--- a/Final Capstone Presentation.pptx
+++ b/Final Capstone Presentation.pptx
@@ -5,7 +5,7 @@
     <p:sldMasterId id="2147483672" r:id="rId1"/>
   </p:sldMasterIdLst>
   <p:notesMasterIdLst>
-    <p:notesMasterId r:id="rId18"/>
+    <p:notesMasterId r:id="rId19"/>
   </p:notesMasterIdLst>
   <p:sldIdLst>
     <p:sldId id="259" r:id="rId2"/>
@@ -15,15 +15,16 @@
     <p:sldId id="264" r:id="rId6"/>
     <p:sldId id="265" r:id="rId7"/>
     <p:sldId id="262" r:id="rId8"/>
-    <p:sldId id="277" r:id="rId9"/>
-    <p:sldId id="276" r:id="rId10"/>
-    <p:sldId id="258" r:id="rId11"/>
-    <p:sldId id="269" r:id="rId12"/>
-    <p:sldId id="260" r:id="rId13"/>
-    <p:sldId id="270" r:id="rId14"/>
-    <p:sldId id="272" r:id="rId15"/>
-    <p:sldId id="275" r:id="rId16"/>
-    <p:sldId id="274" r:id="rId17"/>
+    <p:sldId id="279" r:id="rId9"/>
+    <p:sldId id="277" r:id="rId10"/>
+    <p:sldId id="276" r:id="rId11"/>
+    <p:sldId id="258" r:id="rId12"/>
+    <p:sldId id="280" r:id="rId13"/>
+    <p:sldId id="278" r:id="rId14"/>
+    <p:sldId id="269" r:id="rId15"/>
+    <p:sldId id="260" r:id="rId16"/>
+    <p:sldId id="275" r:id="rId17"/>
+    <p:sldId id="274" r:id="rId18"/>
   </p:sldIdLst>
   <p:sldSz cx="12192000" cy="6858000"/>
   <p:notesSz cx="6858000" cy="9144000"/>
@@ -130,14 +131,6 @@
 </p:presentation>
 </file>
 
-<file path=ppt/revisionInfo.xml><?xml version="1.0" encoding="utf-8"?>
-<p1510:revInfo xmlns:a="http://schemas.openxmlformats.org/drawingml/2006/main" xmlns:r="http://schemas.openxmlformats.org/officeDocument/2006/relationships" xmlns:p1510="http://schemas.microsoft.com/office/powerpoint/2015/10/main">
-  <p1510:revLst>
-    <p1510:client id="{AEFAD51F-2133-E766-7EA4-A4DD19621319}" v="660" dt="2026-04-20T22:16:40.109"/>
-  </p1510:revLst>
-</p1510:revInfo>
-</file>
-
 <file path=ppt/notesMasters/notesMaster1.xml><?xml version="1.0" encoding="utf-8"?>
 <p:notesMaster xmlns:a="http://schemas.openxmlformats.org/drawingml/2006/main" xmlns:r="http://schemas.openxmlformats.org/officeDocument/2006/relationships" xmlns:p="http://schemas.openxmlformats.org/presentationml/2006/main">
   <p:cSld>
@@ -219,7 +212,7 @@
           </a:lstStyle>
           <a:p>
             <a:fld id="{0E62D522-2B80-45A7-B970-459B20B0DE77}" type="datetimeFigureOut">
-              <a:t>4/27/2026</a:t>
+              <a:t>5/6/2026</a:t>
             </a:fld>
             <a:endParaRPr lang="en-US"/>
           </a:p>
@@ -530,12 +523,69 @@
           <a:lstStyle/>
           <a:p>
             <a:r>
-              <a:rPr lang="en-US">
+              <a:rPr lang="en-US" dirty="0">
                 <a:ea typeface="Calibri"/>
                 <a:cs typeface="Calibri"/>
               </a:rPr>
-              <a:t>Mention how it wasn't necessarily difficult retrieving the data, but formatting it correctly to later transform was hard</a:t>
-            </a:r>
+              <a:t>For final project open </a:t>
+            </a:r>
+            <a:r>
+              <a:rPr lang="en-US" dirty="0" err="1">
+                <a:ea typeface="Calibri"/>
+                <a:cs typeface="Calibri"/>
+              </a:rPr>
+              <a:t>metabase</a:t>
+            </a:r>
+            <a:r>
+              <a:rPr lang="en-US" dirty="0">
+                <a:ea typeface="Calibri"/>
+                <a:cs typeface="Calibri"/>
+              </a:rPr>
+              <a:t> and explore with class</a:t>
+            </a:r>
+          </a:p>
+          <a:p>
+            <a:r>
+              <a:rPr lang="en-US" dirty="0">
+                <a:ea typeface="Calibri"/>
+                <a:cs typeface="Calibri"/>
+              </a:rPr>
+              <a:t>Need Docker to open container in </a:t>
+            </a:r>
+            <a:r>
+              <a:rPr lang="en-US" dirty="0" err="1">
+                <a:ea typeface="Calibri"/>
+                <a:cs typeface="Calibri"/>
+              </a:rPr>
+              <a:t>metabase</a:t>
+            </a:r>
+            <a:r>
+              <a:rPr lang="en-US" dirty="0">
+                <a:ea typeface="Calibri"/>
+                <a:cs typeface="Calibri"/>
+              </a:rPr>
+              <a:t> </a:t>
+            </a:r>
+          </a:p>
+          <a:p>
+            <a:r>
+              <a:rPr lang="en-US" dirty="0">
+                <a:ea typeface="Calibri"/>
+                <a:cs typeface="Calibri"/>
+              </a:rPr>
+              <a:t>embed to </a:t>
+            </a:r>
+            <a:r>
+              <a:rPr lang="en-US" dirty="0" err="1">
+                <a:ea typeface="Calibri"/>
+                <a:cs typeface="Calibri"/>
+              </a:rPr>
+              <a:t>powerpoint</a:t>
+            </a:r>
+            <a:endParaRPr lang="en-US" dirty="0">
+              <a:ea typeface="Calibri"/>
+              <a:cs typeface="Calibri"/>
+            </a:endParaRPr>
           </a:p>
         </p:txBody>
       </p:sp>
@@ -554,8 +604,9 @@
           <a:bodyPr/>
           <a:lstStyle/>
           <a:p>
-            <a:fld id="{6F7B44D2-87B3-421A-82A4-CED25299E3B5}" type="slidenum">
-              <a:t>4</a:t>
+            <a:fld id="{E130B210-6C8B-4995-AB14-76A137C68073}" type="slidenum">
+              <a:rPr lang="en-US"/>
+              <a:t>1</a:t>
             </a:fld>
             <a:endParaRPr lang="en-US"/>
           </a:p>
@@ -564,7 +615,7 @@
     </p:spTree>
     <p:extLst>
       <p:ext uri="{BB962C8B-B14F-4D97-AF65-F5344CB8AC3E}">
-        <p14:creationId xmlns:p14="http://schemas.microsoft.com/office/powerpoint/2010/main" val="485813584"/>
+        <p14:creationId xmlns:p14="http://schemas.microsoft.com/office/powerpoint/2010/main" val="851924755"/>
       </p:ext>
     </p:extLst>
   </p:cSld>
@@ -623,6 +674,95 @@
                 <a:ea typeface="Calibri"/>
                 <a:cs typeface="Calibri"/>
               </a:rPr>
+              <a:t>Mention how it wasn't necessarily difficult retrieving the data, but formatting it correctly to later transform was hard</a:t>
+            </a:r>
+          </a:p>
+        </p:txBody>
+      </p:sp>
+      <p:sp>
+        <p:nvSpPr>
+          <p:cNvPr id="4" name="Slide Number Placeholder 3"/>
+          <p:cNvSpPr>
+            <a:spLocks noGrp="1"/>
+          </p:cNvSpPr>
+          <p:nvPr>
+            <p:ph type="sldNum" sz="quarter" idx="5"/>
+          </p:nvPr>
+        </p:nvSpPr>
+        <p:spPr/>
+        <p:txBody>
+          <a:bodyPr/>
+          <a:lstStyle/>
+          <a:p>
+            <a:fld id="{6F7B44D2-87B3-421A-82A4-CED25299E3B5}" type="slidenum">
+              <a:t>4</a:t>
+            </a:fld>
+            <a:endParaRPr lang="en-US"/>
+          </a:p>
+        </p:txBody>
+      </p:sp>
+    </p:spTree>
+    <p:extLst>
+      <p:ext uri="{BB962C8B-B14F-4D97-AF65-F5344CB8AC3E}">
+        <p14:creationId xmlns:p14="http://schemas.microsoft.com/office/powerpoint/2010/main" val="485813584"/>
+      </p:ext>
+    </p:extLst>
+  </p:cSld>
+  <p:clrMapOvr>
+    <a:masterClrMapping/>
+  </p:clrMapOvr>
+</p:notes>
+</file>
+
+<file path=ppt/notesSlides/notesSlide3.xml><?xml version="1.0" encoding="utf-8"?>
+<p:notes xmlns:a="http://schemas.openxmlformats.org/drawingml/2006/main" xmlns:r="http://schemas.openxmlformats.org/officeDocument/2006/relationships" xmlns:p="http://schemas.openxmlformats.org/presentationml/2006/main">
+  <p:cSld>
+    <p:spTree>
+      <p:nvGrpSpPr>
+        <p:cNvPr id="1" name=""/>
+        <p:cNvGrpSpPr/>
+        <p:nvPr/>
+      </p:nvGrpSpPr>
+      <p:grpSpPr>
+        <a:xfrm>
+          <a:off x="0" y="0"/>
+          <a:ext cx="0" cy="0"/>
+          <a:chOff x="0" y="0"/>
+          <a:chExt cx="0" cy="0"/>
+        </a:xfrm>
+      </p:grpSpPr>
+      <p:sp>
+        <p:nvSpPr>
+          <p:cNvPr id="2" name="Slide Image Placeholder 1"/>
+          <p:cNvSpPr>
+            <a:spLocks noGrp="1" noRot="1" noChangeAspect="1"/>
+          </p:cNvSpPr>
+          <p:nvPr>
+            <p:ph type="sldImg"/>
+          </p:nvPr>
+        </p:nvSpPr>
+        <p:spPr/>
+      </p:sp>
+      <p:sp>
+        <p:nvSpPr>
+          <p:cNvPr id="3" name="Notes Placeholder 2"/>
+          <p:cNvSpPr>
+            <a:spLocks noGrp="1"/>
+          </p:cNvSpPr>
+          <p:nvPr>
+            <p:ph type="body" idx="1"/>
+          </p:nvPr>
+        </p:nvSpPr>
+        <p:spPr/>
+        <p:txBody>
+          <a:bodyPr/>
+          <a:lstStyle/>
+          <a:p>
+            <a:r>
+              <a:rPr lang="en-US">
+                <a:ea typeface="Calibri"/>
+                <a:cs typeface="Calibri"/>
+              </a:rPr>
               <a:t>Forgot to assign when dropping duplicates</a:t>
             </a:r>
           </a:p>
@@ -686,7 +826,7 @@
 </p:notes>
 </file>
 
-<file path=ppt/notesSlides/notesSlide3.xml><?xml version="1.0" encoding="utf-8"?>
+<file path=ppt/notesSlides/notesSlide4.xml><?xml version="1.0" encoding="utf-8"?>
 <p:notes xmlns:a="http://schemas.openxmlformats.org/drawingml/2006/main" xmlns:r="http://schemas.openxmlformats.org/officeDocument/2006/relationships" xmlns:p="http://schemas.openxmlformats.org/presentationml/2006/main">
   <p:cSld>
     <p:spTree>
@@ -999,7 +1139,7 @@
           <a:p>
             <a:fld id="{888411FB-1606-4EC5-9BCA-2DC04C2243EA}" type="datetimeFigureOut">
               <a:rPr lang="en-US" dirty="0"/>
-              <a:t>4/27/2026</a:t>
+              <a:t>5/6/2026</a:t>
             </a:fld>
             <a:endParaRPr lang="en-US" dirty="0"/>
           </a:p>
@@ -1201,7 +1341,7 @@
           <a:p>
             <a:fld id="{EE1F3D07-6BCF-40BC-A7F7-89BB8FFE98C6}" type="datetimeFigureOut">
               <a:rPr lang="en-US" dirty="0"/>
-              <a:t>4/27/2026</a:t>
+              <a:t>5/6/2026</a:t>
             </a:fld>
             <a:endParaRPr lang="en-US" dirty="0"/>
           </a:p>
@@ -1413,7 +1553,7 @@
           <a:p>
             <a:fld id="{CED16D97-0980-426F-BEA7-F6EB2DE3AC08}" type="datetimeFigureOut">
               <a:rPr lang="en-US" dirty="0"/>
-              <a:t>4/27/2026</a:t>
+              <a:t>5/6/2026</a:t>
             </a:fld>
             <a:endParaRPr lang="en-US" dirty="0"/>
           </a:p>
@@ -1625,7 +1765,7 @@
           <a:p>
             <a:fld id="{D3BCAA53-8FBA-45E2-8B10-F7DD55E4E759}" type="datetimeFigureOut">
               <a:rPr lang="en-US" dirty="0"/>
-              <a:t>4/27/2026</a:t>
+              <a:t>5/6/2026</a:t>
             </a:fld>
             <a:endParaRPr lang="en-US" dirty="0"/>
           </a:p>
@@ -1908,7 +2048,7 @@
           <a:p>
             <a:fld id="{2F8C84CF-6F0D-4195-920D-9D6F75893720}" type="datetimeFigureOut">
               <a:rPr lang="en-US" dirty="0"/>
-              <a:t>4/27/2026</a:t>
+              <a:t>5/6/2026</a:t>
             </a:fld>
             <a:endParaRPr lang="en-US" dirty="0"/>
           </a:p>
@@ -2188,7 +2328,7 @@
           <a:p>
             <a:fld id="{121B3BBE-A1CF-4CC7-B02C-EBCBBE110242}" type="datetimeFigureOut">
               <a:rPr lang="en-US" dirty="0"/>
-              <a:t>4/27/2026</a:t>
+              <a:t>5/6/2026</a:t>
             </a:fld>
             <a:endParaRPr lang="en-US" dirty="0"/>
           </a:p>
@@ -2610,7 +2750,7 @@
           <a:p>
             <a:fld id="{343D63E4-71A5-4C63-9515-748B28B89764}" type="datetimeFigureOut">
               <a:rPr lang="en-US" dirty="0"/>
-              <a:t>4/27/2026</a:t>
+              <a:t>5/6/2026</a:t>
             </a:fld>
             <a:endParaRPr lang="en-US" dirty="0"/>
           </a:p>
@@ -2766,7 +2906,7 @@
           <a:p>
             <a:fld id="{C7C92BAC-F228-4DAC-8800-3D810F869187}" type="datetimeFigureOut">
               <a:rPr lang="en-US" dirty="0"/>
-              <a:t>4/27/2026</a:t>
+              <a:t>5/6/2026</a:t>
             </a:fld>
             <a:endParaRPr lang="en-US" dirty="0"/>
           </a:p>
@@ -2883,7 +3023,7 @@
           <a:p>
             <a:fld id="{B66EFFE8-7E8E-427A-AB26-E496551AFB7B}" type="datetimeFigureOut">
               <a:rPr lang="en-US" dirty="0"/>
-              <a:t>4/27/2026</a:t>
+              <a:t>5/6/2026</a:t>
             </a:fld>
             <a:endParaRPr lang="en-US" dirty="0"/>
           </a:p>
@@ -3200,7 +3340,7 @@
           <a:p>
             <a:fld id="{C0DC8B19-DE76-4E18-BFC7-EB25B8C421E7}" type="datetimeFigureOut">
               <a:rPr lang="en-US" dirty="0"/>
-              <a:t>4/27/2026</a:t>
+              <a:t>5/6/2026</a:t>
             </a:fld>
             <a:endParaRPr lang="en-US" dirty="0"/>
           </a:p>
@@ -3492,7 +3632,7 @@
           <a:p>
             <a:fld id="{9C10BD94-1F69-4074-BD82-D6EDB89FE74F}" type="datetimeFigureOut">
               <a:rPr lang="en-US" dirty="0"/>
-              <a:t>4/27/2026</a:t>
+              <a:t>5/6/2026</a:t>
             </a:fld>
             <a:endParaRPr lang="en-US" dirty="0"/>
           </a:p>
@@ -3646,6 +3786,13 @@
             <a:schemeClr val="lt1"/>
           </a:fontRef>
         </p:style>
+        <p:txBody>
+          <a:bodyPr/>
+          <a:lstStyle/>
+          <a:p>
+            <a:endParaRPr lang="en-US"/>
+          </a:p>
+        </p:txBody>
       </p:sp>
       <p:sp>
         <p:nvSpPr>
@@ -3702,6 +3849,13 @@
             <a:schemeClr val="lt1"/>
           </a:fontRef>
         </p:style>
+        <p:txBody>
+          <a:bodyPr/>
+          <a:lstStyle/>
+          <a:p>
+            <a:endParaRPr lang="en-US"/>
+          </a:p>
+        </p:txBody>
       </p:sp>
       <p:sp>
         <p:nvSpPr>
@@ -3847,7 +4001,7 @@
           <a:p>
             <a:fld id="{149C728D-416F-40D5-8F13-55E5DD1CE8D1}" type="datetimeFigureOut">
               <a:rPr lang="en-US" dirty="0"/>
-              <a:t>4/27/2026</a:t>
+              <a:t>5/6/2026</a:t>
             </a:fld>
             <a:endParaRPr lang="en-US" dirty="0"/>
           </a:p>
@@ -4471,7 +4625,7 @@
           <p:nvPr/>
         </p:nvPicPr>
         <p:blipFill>
-          <a:blip r:embed="rId2"/>
+          <a:blip r:embed="rId3"/>
           <a:stretch>
             <a:fillRect/>
           </a:stretch>
@@ -4507,6 +4661,208 @@
         <p:cNvPr id="1" name="">
           <a:extLst>
             <a:ext uri="{FF2B5EF4-FFF2-40B4-BE49-F238E27FC236}">
+              <a16:creationId xmlns:a16="http://schemas.microsoft.com/office/drawing/2014/main" id="{219CB309-B20B-18F4-070B-C2430691B5C2}"/>
+            </a:ext>
+          </a:extLst>
+        </p:cNvPr>
+        <p:cNvGrpSpPr/>
+        <p:nvPr/>
+      </p:nvGrpSpPr>
+      <p:grpSpPr>
+        <a:xfrm>
+          <a:off x="0" y="0"/>
+          <a:ext cx="0" cy="0"/>
+          <a:chOff x="0" y="0"/>
+          <a:chExt cx="0" cy="0"/>
+        </a:xfrm>
+      </p:grpSpPr>
+      <p:sp>
+        <p:nvSpPr>
+          <p:cNvPr id="10" name="Title 1">
+            <a:extLst>
+              <a:ext uri="{FF2B5EF4-FFF2-40B4-BE49-F238E27FC236}">
+                <a16:creationId xmlns:a16="http://schemas.microsoft.com/office/drawing/2014/main" id="{269F750B-8F92-7E74-4C71-BB0686CC82C4}"/>
+              </a:ext>
+            </a:extLst>
+          </p:cNvPr>
+          <p:cNvSpPr>
+            <a:spLocks noGrp="1"/>
+          </p:cNvSpPr>
+          <p:nvPr>
+            <p:ph type="title"/>
+          </p:nvPr>
+        </p:nvSpPr>
+        <p:spPr>
+          <a:xfrm>
+            <a:off x="780562" y="3171228"/>
+            <a:ext cx="3424046" cy="2191191"/>
+          </a:xfrm>
+        </p:spPr>
+        <p:txBody>
+          <a:bodyPr vert="horz" lIns="0" tIns="0" rIns="0" bIns="0" rtlCol="0" anchor="b">
+            <a:noAutofit/>
+          </a:bodyPr>
+          <a:lstStyle/>
+          <a:p>
+            <a:r>
+              <a:rPr lang="en-US" sz="2400" b="0" dirty="0">
+                <a:solidFill>
+                  <a:srgbClr val="DA002F"/>
+                </a:solidFill>
+                <a:latin typeface="Avenir Next LT Pro"/>
+              </a:rPr>
+              <a:t>Minimum </a:t>
+            </a:r>
+            <a:r>
+              <a:rPr lang="en-US" sz="2400" b="0">
+                <a:solidFill>
+                  <a:srgbClr val="DA002F"/>
+                </a:solidFill>
+                <a:latin typeface="Avenir Next LT Pro"/>
+              </a:rPr>
+              <a:t>temperatures</a:t>
+            </a:r>
+            <a:br>
+              <a:rPr lang="en-US" sz="2400" b="0" dirty="0">
+                <a:solidFill>
+                  <a:srgbClr val="DA002F"/>
+                </a:solidFill>
+                <a:latin typeface="Avenir Next LT Pro"/>
+              </a:rPr>
+            </a:br>
+            <a:r>
+              <a:rPr lang="en-US" sz="2400" b="0">
+                <a:solidFill>
+                  <a:srgbClr val="DA002F"/>
+                </a:solidFill>
+                <a:latin typeface="Avenir Next LT Pro"/>
+              </a:rPr>
+              <a:t>By Month </a:t>
+            </a:r>
+            <a:endParaRPr lang="en-US" sz="2400" b="0">
+              <a:solidFill>
+                <a:srgbClr val="DA002F"/>
+              </a:solidFill>
+            </a:endParaRPr>
+          </a:p>
+          <a:p>
+            <a:endParaRPr lang="en-US" sz="2800" dirty="0">
+              <a:solidFill>
+                <a:schemeClr val="accent5"/>
+              </a:solidFill>
+            </a:endParaRPr>
+          </a:p>
+        </p:txBody>
+      </p:sp>
+      <p:sp>
+        <p:nvSpPr>
+          <p:cNvPr id="4" name="TextBox 3">
+            <a:extLst>
+              <a:ext uri="{FF2B5EF4-FFF2-40B4-BE49-F238E27FC236}">
+                <a16:creationId xmlns:a16="http://schemas.microsoft.com/office/drawing/2014/main" id="{204878CF-45AA-1A24-9E1B-77A2E3842D97}"/>
+              </a:ext>
+            </a:extLst>
+          </p:cNvPr>
+          <p:cNvSpPr txBox="1"/>
+          <p:nvPr/>
+        </p:nvSpPr>
+        <p:spPr>
+          <a:xfrm>
+            <a:off x="5899812" y="5747054"/>
+            <a:ext cx="4094480" cy="523220"/>
+          </a:xfrm>
+          <a:prstGeom prst="rect">
+            <a:avLst/>
+          </a:prstGeom>
+          <a:noFill/>
+        </p:spPr>
+        <p:txBody>
+          <a:bodyPr rot="0" spcFirstLastPara="0" vertOverflow="overflow" horzOverflow="overflow" vert="horz" wrap="square" lIns="91440" tIns="45720" rIns="91440" bIns="45720" numCol="1" spcCol="0" rtlCol="0" fromWordArt="0" anchor="t" anchorCtr="0" forceAA="0" compatLnSpc="1">
+            <a:prstTxWarp prst="textNoShape">
+              <a:avLst/>
+            </a:prstTxWarp>
+            <a:spAutoFit/>
+          </a:bodyPr>
+          <a:lstStyle/>
+          <a:p>
+            <a:r>
+              <a:rPr lang="en-US" sz="1400" baseline="0">
+                <a:solidFill>
+                  <a:srgbClr val="000000"/>
+                </a:solidFill>
+                <a:latin typeface="Avenir Next LT Pro"/>
+              </a:rPr>
+              <a:t>Previous SQL Query and Metabase to Visualize</a:t>
+            </a:r>
+            <a:endParaRPr lang="en-US" sz="1400">
+              <a:solidFill>
+                <a:srgbClr val="000000"/>
+              </a:solidFill>
+              <a:latin typeface="Avenir Next LT Pro"/>
+            </a:endParaRPr>
+          </a:p>
+          <a:p>
+            <a:pPr algn="ctr"/>
+            <a:endParaRPr lang="en-US" sz="1400">
+              <a:solidFill>
+                <a:srgbClr val="000000"/>
+              </a:solidFill>
+              <a:latin typeface="Avenir Next LT Pro"/>
+            </a:endParaRPr>
+          </a:p>
+        </p:txBody>
+      </p:sp>
+      <p:pic>
+        <p:nvPicPr>
+          <p:cNvPr id="5" name="Picture 4" descr="A graph of the temperature of the year&#10;&#10;AI-generated content may be incorrect.">
+            <a:extLst>
+              <a:ext uri="{FF2B5EF4-FFF2-40B4-BE49-F238E27FC236}">
+                <a16:creationId xmlns:a16="http://schemas.microsoft.com/office/drawing/2014/main" id="{ED13A5C1-C80C-7331-F0BA-0A6EA5DE2264}"/>
+              </a:ext>
+            </a:extLst>
+          </p:cNvPr>
+          <p:cNvPicPr>
+            <a:picLocks noChangeAspect="1"/>
+          </p:cNvPicPr>
+          <p:nvPr/>
+        </p:nvPicPr>
+        <p:blipFill>
+          <a:blip r:embed="rId2"/>
+          <a:stretch>
+            <a:fillRect/>
+          </a:stretch>
+        </p:blipFill>
+        <p:spPr>
+          <a:xfrm>
+            <a:off x="4210468" y="1319213"/>
+            <a:ext cx="7915275" cy="4219575"/>
+          </a:xfrm>
+          <a:prstGeom prst="rect">
+            <a:avLst/>
+          </a:prstGeom>
+        </p:spPr>
+      </p:pic>
+    </p:spTree>
+    <p:extLst>
+      <p:ext uri="{BB962C8B-B14F-4D97-AF65-F5344CB8AC3E}">
+        <p14:creationId xmlns:p14="http://schemas.microsoft.com/office/powerpoint/2010/main" val="815006305"/>
+      </p:ext>
+    </p:extLst>
+  </p:cSld>
+  <p:clrMapOvr>
+    <a:masterClrMapping/>
+  </p:clrMapOvr>
+</p:sld>
+</file>
+
+<file path=ppt/slides/slide11.xml><?xml version="1.0" encoding="utf-8"?>
+<p:sld xmlns:a="http://schemas.openxmlformats.org/drawingml/2006/main" xmlns:r="http://schemas.openxmlformats.org/officeDocument/2006/relationships" xmlns:p="http://schemas.openxmlformats.org/presentationml/2006/main">
+  <p:cSld>
+    <p:spTree>
+      <p:nvGrpSpPr>
+        <p:cNvPr id="1" name="">
+          <a:extLst>
+            <a:ext uri="{FF2B5EF4-FFF2-40B4-BE49-F238E27FC236}">
               <a16:creationId xmlns:a16="http://schemas.microsoft.com/office/drawing/2014/main" id="{80A233D8-8DAC-76E5-9DF5-FE1BCB1145BA}"/>
             </a:ext>
           </a:extLst>
@@ -4795,7 +5151,574 @@
 </p:sld>
 </file>
 
-<file path=ppt/slides/slide11.xml><?xml version="1.0" encoding="utf-8"?>
+<file path=ppt/slides/slide12.xml><?xml version="1.0" encoding="utf-8"?>
+<p:sld xmlns:a="http://schemas.openxmlformats.org/drawingml/2006/main" xmlns:r="http://schemas.openxmlformats.org/officeDocument/2006/relationships" xmlns:p="http://schemas.openxmlformats.org/presentationml/2006/main">
+  <p:cSld>
+    <p:spTree>
+      <p:nvGrpSpPr>
+        <p:cNvPr id="1" name="">
+          <a:extLst>
+            <a:ext uri="{FF2B5EF4-FFF2-40B4-BE49-F238E27FC236}">
+              <a16:creationId xmlns:a16="http://schemas.microsoft.com/office/drawing/2014/main" id="{1C852076-6135-7C0E-88F8-0CD5335A91AC}"/>
+            </a:ext>
+          </a:extLst>
+        </p:cNvPr>
+        <p:cNvGrpSpPr/>
+        <p:nvPr/>
+      </p:nvGrpSpPr>
+      <p:grpSpPr>
+        <a:xfrm>
+          <a:off x="0" y="0"/>
+          <a:ext cx="0" cy="0"/>
+          <a:chOff x="0" y="0"/>
+          <a:chExt cx="0" cy="0"/>
+        </a:xfrm>
+      </p:grpSpPr>
+      <p:sp>
+        <p:nvSpPr>
+          <p:cNvPr id="10" name="Title 1">
+            <a:extLst>
+              <a:ext uri="{FF2B5EF4-FFF2-40B4-BE49-F238E27FC236}">
+                <a16:creationId xmlns:a16="http://schemas.microsoft.com/office/drawing/2014/main" id="{12535C34-2225-2C26-8A88-21D2FD5D2833}"/>
+              </a:ext>
+            </a:extLst>
+          </p:cNvPr>
+          <p:cNvSpPr>
+            <a:spLocks noGrp="1"/>
+          </p:cNvSpPr>
+          <p:nvPr>
+            <p:ph type="title"/>
+          </p:nvPr>
+        </p:nvSpPr>
+        <p:spPr>
+          <a:xfrm>
+            <a:off x="1318755" y="457200"/>
+            <a:ext cx="3932237" cy="1921434"/>
+          </a:xfrm>
+        </p:spPr>
+        <p:txBody>
+          <a:bodyPr vert="horz" lIns="0" tIns="0" rIns="0" bIns="0" rtlCol="0" anchor="b">
+            <a:normAutofit/>
+          </a:bodyPr>
+          <a:lstStyle/>
+          <a:p>
+            <a:pPr>
+              <a:lnSpc>
+                <a:spcPct val="90000"/>
+              </a:lnSpc>
+            </a:pPr>
+            <a:r>
+              <a:rPr lang="en-US" sz="2700">
+                <a:solidFill>
+                  <a:schemeClr val="accent5"/>
+                </a:solidFill>
+              </a:rPr>
+              <a:t>Beyond Temperature:</a:t>
+            </a:r>
+            <a:br>
+              <a:rPr lang="en-US" sz="2700" b="0" dirty="0">
+                <a:solidFill>
+                  <a:schemeClr val="accent5"/>
+                </a:solidFill>
+              </a:rPr>
+            </a:br>
+            <a:r>
+              <a:rPr lang="en-US" sz="2700" b="0">
+                <a:solidFill>
+                  <a:schemeClr val="accent5"/>
+                </a:solidFill>
+              </a:rPr>
+              <a:t>Climate Variables</a:t>
+            </a:r>
+            <a:br>
+              <a:rPr lang="en-US" sz="2700" b="0" dirty="0">
+                <a:solidFill>
+                  <a:schemeClr val="accent5"/>
+                </a:solidFill>
+              </a:rPr>
+            </a:br>
+            <a:r>
+              <a:rPr lang="en-US" sz="2700" b="0">
+                <a:solidFill>
+                  <a:schemeClr val="accent5"/>
+                </a:solidFill>
+              </a:rPr>
+              <a:t>By Month</a:t>
+            </a:r>
+            <a:r>
+              <a:rPr lang="en-US" sz="2700" b="0" dirty="0"/>
+              <a:t> </a:t>
+            </a:r>
+          </a:p>
+          <a:p>
+            <a:pPr>
+              <a:lnSpc>
+                <a:spcPct val="90000"/>
+              </a:lnSpc>
+            </a:pPr>
+            <a:endParaRPr lang="en-US" sz="2700"/>
+          </a:p>
+        </p:txBody>
+      </p:sp>
+      <p:sp>
+        <p:nvSpPr>
+          <p:cNvPr id="4" name="TextBox 3">
+            <a:extLst>
+              <a:ext uri="{FF2B5EF4-FFF2-40B4-BE49-F238E27FC236}">
+                <a16:creationId xmlns:a16="http://schemas.microsoft.com/office/drawing/2014/main" id="{D0BD2526-2E45-055E-6BFD-0ECA3587D024}"/>
+              </a:ext>
+            </a:extLst>
+          </p:cNvPr>
+          <p:cNvSpPr txBox="1"/>
+          <p:nvPr/>
+        </p:nvSpPr>
+        <p:spPr>
+          <a:xfrm>
+            <a:off x="4512810" y="5463091"/>
+            <a:ext cx="3932237" cy="275803"/>
+          </a:xfrm>
+          <a:prstGeom prst="rect">
+            <a:avLst/>
+          </a:prstGeom>
+        </p:spPr>
+        <p:txBody>
+          <a:bodyPr rot="0" spcFirstLastPara="0" vertOverflow="overflow" horzOverflow="overflow" vert="horz" lIns="0" tIns="0" rIns="0" bIns="0" numCol="1" spcCol="0" rtlCol="0" fromWordArt="0" anchor="t" anchorCtr="0" forceAA="0" compatLnSpc="1">
+            <a:prstTxWarp prst="textNoShape">
+              <a:avLst/>
+            </a:prstTxWarp>
+            <a:normAutofit/>
+          </a:bodyPr>
+          <a:lstStyle/>
+          <a:p>
+            <a:pPr>
+              <a:spcBef>
+                <a:spcPts val="1000"/>
+              </a:spcBef>
+            </a:pPr>
+            <a:r>
+              <a:rPr lang="en-US" sz="1600" kern="1200" baseline="0" dirty="0" err="1"/>
+              <a:t>Metabase</a:t>
+            </a:r>
+            <a:r>
+              <a:rPr lang="en-US" sz="1600" kern="1200" baseline="0" dirty="0"/>
+              <a:t> to Visualize</a:t>
+            </a:r>
+            <a:endParaRPr lang="en-US" sz="1600" kern="1200" dirty="0"/>
+          </a:p>
+          <a:p>
+            <a:pPr>
+              <a:spcBef>
+                <a:spcPts val="1000"/>
+              </a:spcBef>
+            </a:pPr>
+            <a:endParaRPr lang="en-US" sz="1600" kern="1200"/>
+          </a:p>
+        </p:txBody>
+      </p:sp>
+      <p:sp>
+        <p:nvSpPr>
+          <p:cNvPr id="15" name="Date Placeholder 4">
+            <a:extLst>
+              <a:ext uri="{FF2B5EF4-FFF2-40B4-BE49-F238E27FC236}">
+                <a16:creationId xmlns:a16="http://schemas.microsoft.com/office/drawing/2014/main" id="{33F3267B-37FF-B1B1-E1B3-3BB8CB72C630}"/>
+              </a:ext>
+            </a:extLst>
+          </p:cNvPr>
+          <p:cNvSpPr>
+            <a:spLocks noGrp="1"/>
+          </p:cNvSpPr>
+          <p:nvPr>
+            <p:ph type="dt" sz="half" idx="10"/>
+          </p:nvPr>
+        </p:nvSpPr>
+        <p:spPr>
+          <a:xfrm>
+            <a:off x="7910111" y="6409170"/>
+            <a:ext cx="3702392" cy="448830"/>
+          </a:xfrm>
+        </p:spPr>
+        <p:txBody>
+          <a:bodyPr/>
+          <a:lstStyle/>
+          <a:p>
+            <a:pPr>
+              <a:spcAft>
+                <a:spcPts val="600"/>
+              </a:spcAft>
+            </a:pPr>
+            <a:fld id="{DA251291-D7EE-4322-A698-ABAAAAE5EF88}" type="datetime1">
+              <a:pPr>
+                <a:spcAft>
+                  <a:spcPts val="600"/>
+                </a:spcAft>
+              </a:pPr>
+              <a:t>5/6/2026</a:t>
+            </a:fld>
+            <a:endParaRPr lang="en-US"/>
+          </a:p>
+        </p:txBody>
+      </p:sp>
+      <p:sp>
+        <p:nvSpPr>
+          <p:cNvPr id="17" name="Footer Placeholder 5">
+            <a:extLst>
+              <a:ext uri="{FF2B5EF4-FFF2-40B4-BE49-F238E27FC236}">
+                <a16:creationId xmlns:a16="http://schemas.microsoft.com/office/drawing/2014/main" id="{C8D49270-7C8B-90A1-979F-973C2CE273C7}"/>
+              </a:ext>
+            </a:extLst>
+          </p:cNvPr>
+          <p:cNvSpPr>
+            <a:spLocks noGrp="1"/>
+          </p:cNvSpPr>
+          <p:nvPr>
+            <p:ph type="ftr" sz="quarter" idx="11"/>
+          </p:nvPr>
+        </p:nvSpPr>
+        <p:spPr>
+          <a:xfrm rot="5400000">
+            <a:off x="-1828801" y="1912217"/>
+            <a:ext cx="4114800" cy="457200"/>
+          </a:xfrm>
+        </p:spPr>
+        <p:txBody>
+          <a:bodyPr/>
+          <a:lstStyle/>
+          <a:p>
+            <a:pPr>
+              <a:spcAft>
+                <a:spcPts val="600"/>
+              </a:spcAft>
+            </a:pPr>
+            <a:r>
+              <a:rPr lang="en-US"/>
+              <a:t>
+              </a:t>
+            </a:r>
+          </a:p>
+        </p:txBody>
+      </p:sp>
+      <p:sp>
+        <p:nvSpPr>
+          <p:cNvPr id="19" name="Slide Number Placeholder 6">
+            <a:extLst>
+              <a:ext uri="{FF2B5EF4-FFF2-40B4-BE49-F238E27FC236}">
+                <a16:creationId xmlns:a16="http://schemas.microsoft.com/office/drawing/2014/main" id="{40DCD0C6-86EB-FC4B-2974-1074E6FE0616}"/>
+              </a:ext>
+            </a:extLst>
+          </p:cNvPr>
+          <p:cNvSpPr>
+            <a:spLocks noGrp="1"/>
+          </p:cNvSpPr>
+          <p:nvPr>
+            <p:ph type="sldNum" sz="quarter" idx="12"/>
+          </p:nvPr>
+        </p:nvSpPr>
+        <p:spPr>
+          <a:xfrm>
+            <a:off x="11669678" y="6408742"/>
+            <a:ext cx="438652" cy="448830"/>
+          </a:xfrm>
+        </p:spPr>
+        <p:txBody>
+          <a:bodyPr/>
+          <a:lstStyle/>
+          <a:p>
+            <a:pPr>
+              <a:spcAft>
+                <a:spcPts val="600"/>
+              </a:spcAft>
+            </a:pPr>
+            <a:fld id="{017DE1FC-E54A-4B87-A814-263D1E8654B2}" type="slidenum">
+              <a:rPr lang="en-US" dirty="0"/>
+              <a:pPr>
+                <a:spcAft>
+                  <a:spcPts val="600"/>
+                </a:spcAft>
+              </a:pPr>
+              <a:t>12</a:t>
+            </a:fld>
+            <a:endParaRPr lang="en-US"/>
+          </a:p>
+        </p:txBody>
+      </p:sp>
+      <p:pic>
+        <p:nvPicPr>
+          <p:cNvPr id="3" name="Picture 2" descr="A graph of blue and green vertical bars&#10;&#10;AI-generated content may be incorrect.">
+            <a:extLst>
+              <a:ext uri="{FF2B5EF4-FFF2-40B4-BE49-F238E27FC236}">
+                <a16:creationId xmlns:a16="http://schemas.microsoft.com/office/drawing/2014/main" id="{A0B4DC99-FFB9-2F67-AF48-0E0B7CC8DA38}"/>
+              </a:ext>
+            </a:extLst>
+          </p:cNvPr>
+          <p:cNvPicPr>
+            <a:picLocks noChangeAspect="1"/>
+          </p:cNvPicPr>
+          <p:nvPr/>
+        </p:nvPicPr>
+        <p:blipFill>
+          <a:blip r:embed="rId2"/>
+          <a:stretch>
+            <a:fillRect/>
+          </a:stretch>
+        </p:blipFill>
+        <p:spPr>
+          <a:xfrm>
+            <a:off x="5977774" y="2142920"/>
+            <a:ext cx="6131928" cy="2968626"/>
+          </a:xfrm>
+          <a:prstGeom prst="rect">
+            <a:avLst/>
+          </a:prstGeom>
+        </p:spPr>
+      </p:pic>
+      <p:pic>
+        <p:nvPicPr>
+          <p:cNvPr id="2" name="Picture 1" descr="A graph with blue and green bars&#10;&#10;AI-generated content may be incorrect.">
+            <a:extLst>
+              <a:ext uri="{FF2B5EF4-FFF2-40B4-BE49-F238E27FC236}">
+                <a16:creationId xmlns:a16="http://schemas.microsoft.com/office/drawing/2014/main" id="{711D6FF1-36A7-2801-C16E-85C942253252}"/>
+              </a:ext>
+            </a:extLst>
+          </p:cNvPr>
+          <p:cNvPicPr>
+            <a:picLocks noChangeAspect="1"/>
+          </p:cNvPicPr>
+          <p:nvPr/>
+        </p:nvPicPr>
+        <p:blipFill>
+          <a:blip r:embed="rId3"/>
+          <a:stretch>
+            <a:fillRect/>
+          </a:stretch>
+        </p:blipFill>
+        <p:spPr>
+          <a:xfrm>
+            <a:off x="107476" y="2139926"/>
+            <a:ext cx="5983406" cy="2942089"/>
+          </a:xfrm>
+          <a:prstGeom prst="rect">
+            <a:avLst/>
+          </a:prstGeom>
+        </p:spPr>
+      </p:pic>
+    </p:spTree>
+    <p:extLst>
+      <p:ext uri="{BB962C8B-B14F-4D97-AF65-F5344CB8AC3E}">
+        <p14:creationId xmlns:p14="http://schemas.microsoft.com/office/powerpoint/2010/main" val="358752395"/>
+      </p:ext>
+    </p:extLst>
+  </p:cSld>
+  <p:clrMapOvr>
+    <a:masterClrMapping/>
+  </p:clrMapOvr>
+</p:sld>
+</file>
+
+<file path=ppt/slides/slide13.xml><?xml version="1.0" encoding="utf-8"?>
+<p:sld xmlns:a="http://schemas.openxmlformats.org/drawingml/2006/main" xmlns:r="http://schemas.openxmlformats.org/officeDocument/2006/relationships" xmlns:p="http://schemas.openxmlformats.org/presentationml/2006/main">
+  <p:cSld>
+    <p:spTree>
+      <p:nvGrpSpPr>
+        <p:cNvPr id="1" name="">
+          <a:extLst>
+            <a:ext uri="{FF2B5EF4-FFF2-40B4-BE49-F238E27FC236}">
+              <a16:creationId xmlns:a16="http://schemas.microsoft.com/office/drawing/2014/main" id="{4568BEBC-17DB-7F0B-A7CD-18249332F54A}"/>
+            </a:ext>
+          </a:extLst>
+        </p:cNvPr>
+        <p:cNvGrpSpPr/>
+        <p:nvPr/>
+      </p:nvGrpSpPr>
+      <p:grpSpPr>
+        <a:xfrm>
+          <a:off x="0" y="0"/>
+          <a:ext cx="0" cy="0"/>
+          <a:chOff x="0" y="0"/>
+          <a:chExt cx="0" cy="0"/>
+        </a:xfrm>
+      </p:grpSpPr>
+      <p:sp>
+        <p:nvSpPr>
+          <p:cNvPr id="11" name="Title 1">
+            <a:extLst>
+              <a:ext uri="{FF2B5EF4-FFF2-40B4-BE49-F238E27FC236}">
+                <a16:creationId xmlns:a16="http://schemas.microsoft.com/office/drawing/2014/main" id="{CC25D589-46D4-A6FC-9CEB-1B18C52E4B37}"/>
+              </a:ext>
+            </a:extLst>
+          </p:cNvPr>
+          <p:cNvSpPr>
+            <a:spLocks noGrp="1"/>
+          </p:cNvSpPr>
+          <p:nvPr>
+            <p:ph type="title"/>
+          </p:nvPr>
+        </p:nvSpPr>
+        <p:spPr>
+          <a:xfrm>
+            <a:off x="868680" y="1709928"/>
+            <a:ext cx="3169088" cy="1225019"/>
+          </a:xfrm>
+        </p:spPr>
+        <p:txBody>
+          <a:bodyPr vert="horz" lIns="0" tIns="0" rIns="0" bIns="0" rtlCol="0" anchor="ctr">
+            <a:noAutofit/>
+          </a:bodyPr>
+          <a:lstStyle/>
+          <a:p>
+            <a:r>
+              <a:rPr lang="en-US" sz="2400" b="0">
+                <a:solidFill>
+                  <a:srgbClr val="DA002F"/>
+                </a:solidFill>
+                <a:latin typeface="Avenir Next LT Pro"/>
+              </a:rPr>
+              <a:t>Heatmap</a:t>
+            </a:r>
+            <a:endParaRPr lang="en-US" sz="2400" b="0">
+              <a:solidFill>
+                <a:srgbClr val="DA002F"/>
+              </a:solidFill>
+            </a:endParaRPr>
+          </a:p>
+        </p:txBody>
+      </p:sp>
+      <p:sp>
+        <p:nvSpPr>
+          <p:cNvPr id="13" name="Text Placeholder 3">
+            <a:extLst>
+              <a:ext uri="{FF2B5EF4-FFF2-40B4-BE49-F238E27FC236}">
+                <a16:creationId xmlns:a16="http://schemas.microsoft.com/office/drawing/2014/main" id="{CD6A4F27-2255-1462-A9B8-E6C29B7A5C22}"/>
+              </a:ext>
+            </a:extLst>
+          </p:cNvPr>
+          <p:cNvSpPr>
+            <a:spLocks noGrp="1"/>
+          </p:cNvSpPr>
+          <p:nvPr>
+            <p:ph type="body" sz="half" idx="2"/>
+          </p:nvPr>
+        </p:nvSpPr>
+        <p:spPr>
+          <a:xfrm>
+            <a:off x="899160" y="3427984"/>
+            <a:ext cx="3099816" cy="2057400"/>
+          </a:xfrm>
+        </p:spPr>
+        <p:txBody>
+          <a:bodyPr vert="horz" lIns="91440" tIns="45720" rIns="91440" bIns="45720" rtlCol="0" anchor="t">
+            <a:noAutofit/>
+          </a:bodyPr>
+          <a:lstStyle/>
+          <a:p>
+            <a:r>
+              <a:rPr lang="en-US" sz="2400" dirty="0"/>
+              <a:t>Average monthly temperature is very similar</a:t>
+            </a:r>
+          </a:p>
+        </p:txBody>
+      </p:sp>
+      <p:sp>
+        <p:nvSpPr>
+          <p:cNvPr id="9" name="TextBox 8">
+            <a:extLst>
+              <a:ext uri="{FF2B5EF4-FFF2-40B4-BE49-F238E27FC236}">
+                <a16:creationId xmlns:a16="http://schemas.microsoft.com/office/drawing/2014/main" id="{2E88DF60-9F15-BE52-C0F5-0EBC6DE1E55D}"/>
+              </a:ext>
+            </a:extLst>
+          </p:cNvPr>
+          <p:cNvSpPr txBox="1"/>
+          <p:nvPr/>
+        </p:nvSpPr>
+        <p:spPr>
+          <a:xfrm>
+            <a:off x="4053840" y="5908040"/>
+            <a:ext cx="4094480" cy="523220"/>
+          </a:xfrm>
+          <a:prstGeom prst="rect">
+            <a:avLst/>
+          </a:prstGeom>
+          <a:noFill/>
+        </p:spPr>
+        <p:txBody>
+          <a:bodyPr rot="0" spcFirstLastPara="0" vertOverflow="overflow" horzOverflow="overflow" vert="horz" wrap="square" lIns="91440" tIns="45720" rIns="91440" bIns="45720" numCol="1" spcCol="0" rtlCol="0" fromWordArt="0" anchor="t" anchorCtr="0" forceAA="0" compatLnSpc="1">
+            <a:prstTxWarp prst="textNoShape">
+              <a:avLst/>
+            </a:prstTxWarp>
+            <a:spAutoFit/>
+          </a:bodyPr>
+          <a:lstStyle/>
+          <a:p>
+            <a:r>
+              <a:rPr lang="en-US" sz="1400" baseline="0">
+                <a:solidFill>
+                  <a:srgbClr val="000000"/>
+                </a:solidFill>
+                <a:latin typeface="Avenir Next LT Pro"/>
+              </a:rPr>
+              <a:t>Previous SQL Query and Metabase to Visualize</a:t>
+            </a:r>
+            <a:endParaRPr lang="en-US" sz="1400">
+              <a:solidFill>
+                <a:srgbClr val="000000"/>
+              </a:solidFill>
+              <a:latin typeface="Avenir Next LT Pro"/>
+            </a:endParaRPr>
+          </a:p>
+          <a:p>
+            <a:pPr algn="ctr"/>
+            <a:endParaRPr lang="en-US" sz="1400">
+              <a:solidFill>
+                <a:srgbClr val="000000"/>
+              </a:solidFill>
+              <a:latin typeface="Avenir Next LT Pro"/>
+            </a:endParaRPr>
+          </a:p>
+        </p:txBody>
+      </p:sp>
+      <p:pic>
+        <p:nvPicPr>
+          <p:cNvPr id="2" name="Picture 1" descr="A graph showing temperature and heatmap&#10;&#10;AI-generated content may be incorrect.">
+            <a:extLst>
+              <a:ext uri="{FF2B5EF4-FFF2-40B4-BE49-F238E27FC236}">
+                <a16:creationId xmlns:a16="http://schemas.microsoft.com/office/drawing/2014/main" id="{ABA6FA2E-5CE3-300B-4D30-197909A78E40}"/>
+              </a:ext>
+            </a:extLst>
+          </p:cNvPr>
+          <p:cNvPicPr>
+            <a:picLocks noChangeAspect="1"/>
+          </p:cNvPicPr>
+          <p:nvPr/>
+        </p:nvPicPr>
+        <p:blipFill>
+          <a:blip r:embed="rId2"/>
+          <a:stretch>
+            <a:fillRect/>
+          </a:stretch>
+        </p:blipFill>
+        <p:spPr>
+          <a:xfrm>
+            <a:off x="4500726" y="477671"/>
+            <a:ext cx="6841325" cy="5424986"/>
+          </a:xfrm>
+          <a:prstGeom prst="rect">
+            <a:avLst/>
+          </a:prstGeom>
+        </p:spPr>
+      </p:pic>
+    </p:spTree>
+    <p:extLst>
+      <p:ext uri="{BB962C8B-B14F-4D97-AF65-F5344CB8AC3E}">
+        <p14:creationId xmlns:p14="http://schemas.microsoft.com/office/powerpoint/2010/main" val="3944085156"/>
+      </p:ext>
+    </p:extLst>
+  </p:cSld>
+  <p:clrMapOvr>
+    <a:masterClrMapping/>
+  </p:clrMapOvr>
+</p:sld>
+</file>
+
+<file path=ppt/slides/slide14.xml><?xml version="1.0" encoding="utf-8"?>
 <p:sld xmlns:a="http://schemas.openxmlformats.org/drawingml/2006/main" xmlns:r="http://schemas.openxmlformats.org/officeDocument/2006/relationships" xmlns:p="http://schemas.openxmlformats.org/presentationml/2006/main">
   <p:cSld>
     <p:spTree>
@@ -4969,15 +5892,51 @@
           <a:lstStyle/>
           <a:p>
             <a:r>
-              <a:rPr lang="en-US" sz="1400" baseline="0">
+              <a:rPr lang="en-US" sz="1400" baseline="0" dirty="0">
                 <a:solidFill>
                   <a:srgbClr val="000000"/>
                 </a:solidFill>
                 <a:latin typeface="Avenir Next LT Pro"/>
               </a:rPr>
-              <a:t>Previous SQL Query and Metabase to Visualize</a:t>
-            </a:r>
-            <a:endParaRPr lang="en-US" sz="1400">
+              <a:t>Previous SQL Query </a:t>
+            </a:r>
+            <a:r>
+              <a:rPr lang="en-US" sz="1400" dirty="0">
+                <a:solidFill>
+                  <a:srgbClr val="000000"/>
+                </a:solidFill>
+                <a:latin typeface="Avenir Next LT Pro"/>
+              </a:rPr>
+              <a:t>and</a:t>
+            </a:r>
+            <a:r>
+              <a:rPr lang="en-US" sz="1400" baseline="0" dirty="0">
+                <a:solidFill>
+                  <a:srgbClr val="000000"/>
+                </a:solidFill>
+                <a:latin typeface="Avenir Next LT Pro"/>
+              </a:rPr>
+              <a:t> </a:t>
+            </a:r>
+            <a:r>
+              <a:rPr lang="en-US" sz="1400" dirty="0">
+                <a:solidFill>
+                  <a:srgbClr val="000000"/>
+                </a:solidFill>
+                <a:latin typeface="Avenir Next LT Pro"/>
+              </a:rPr>
+              <a:t>Python </a:t>
+            </a:r>
+            <a:r>
+              <a:rPr lang="en-US" sz="1400" baseline="0" dirty="0">
+                <a:solidFill>
+                  <a:srgbClr val="000000"/>
+                </a:solidFill>
+                <a:latin typeface="Avenir Next LT Pro"/>
+              </a:rPr>
+              <a:t>to Visualize</a:t>
+            </a:r>
+            <a:endParaRPr lang="en-US" sz="1400" dirty="0">
               <a:solidFill>
                 <a:srgbClr val="000000"/>
               </a:solidFill>
@@ -4997,10 +5956,10 @@
       </p:sp>
       <p:pic>
         <p:nvPicPr>
-          <p:cNvPr id="2" name="Picture 1" descr="A graph with purple squares&#10;&#10;AI-generated content may be incorrect.">
-            <a:extLst>
-              <a:ext uri="{FF2B5EF4-FFF2-40B4-BE49-F238E27FC236}">
-                <a16:creationId xmlns:a16="http://schemas.microsoft.com/office/drawing/2014/main" id="{26A001E3-D7FE-3AB6-34BF-C2E122F3ABA8}"/>
+          <p:cNvPr id="4" name="Picture 3" descr="A graph of a number of people&#10;&#10;AI-generated content may be incorrect.">
+            <a:extLst>
+              <a:ext uri="{FF2B5EF4-FFF2-40B4-BE49-F238E27FC236}">
+                <a16:creationId xmlns:a16="http://schemas.microsoft.com/office/drawing/2014/main" id="{AFFC9FBB-E582-9EF6-F1A6-4F190AB8CF1B}"/>
               </a:ext>
             </a:extLst>
           </p:cNvPr>
@@ -5017,38 +5976,8 @@
         </p:blipFill>
         <p:spPr>
           <a:xfrm>
-            <a:off x="6372404" y="6290"/>
-            <a:ext cx="5816361" cy="2963533"/>
-          </a:xfrm>
-          <a:prstGeom prst="rect">
-            <a:avLst/>
-          </a:prstGeom>
-        </p:spPr>
-      </p:pic>
-      <p:pic>
-        <p:nvPicPr>
-          <p:cNvPr id="5" name="Picture 4" descr="A screenshot of a computer&#10;&#10;AI-generated content may be incorrect.">
-            <a:extLst>
-              <a:ext uri="{FF2B5EF4-FFF2-40B4-BE49-F238E27FC236}">
-                <a16:creationId xmlns:a16="http://schemas.microsoft.com/office/drawing/2014/main" id="{BDF320A9-C6A6-6D39-8A97-AD5EF326B46A}"/>
-              </a:ext>
-            </a:extLst>
-          </p:cNvPr>
-          <p:cNvPicPr>
-            <a:picLocks noChangeAspect="1"/>
-          </p:cNvPicPr>
-          <p:nvPr/>
-        </p:nvPicPr>
-        <p:blipFill>
-          <a:blip r:embed="rId3"/>
-          <a:stretch>
-            <a:fillRect/>
-          </a:stretch>
-        </p:blipFill>
-        <p:spPr>
-          <a:xfrm>
-            <a:off x="4053840" y="3316171"/>
-            <a:ext cx="8148320" cy="1932539"/>
+            <a:off x="4457506" y="321811"/>
+            <a:ext cx="7663815" cy="5174777"/>
           </a:xfrm>
           <a:prstGeom prst="rect">
             <a:avLst/>
@@ -5068,7 +5997,7 @@
 </p:sld>
 </file>
 
-<file path=ppt/slides/slide12.xml><?xml version="1.0" encoding="utf-8"?>
+<file path=ppt/slides/slide15.xml><?xml version="1.0" encoding="utf-8"?>
 <p:sld xmlns:a="http://schemas.openxmlformats.org/drawingml/2006/main" xmlns:r="http://schemas.openxmlformats.org/officeDocument/2006/relationships" xmlns:p="http://schemas.openxmlformats.org/presentationml/2006/main">
   <p:cSld>
     <p:spTree>
@@ -5150,8 +6079,8 @@
         </p:nvSpPr>
         <p:spPr>
           <a:xfrm>
-            <a:off x="899160" y="3427984"/>
-            <a:ext cx="3099816" cy="2057400"/>
+            <a:off x="866963" y="2934294"/>
+            <a:ext cx="3350024" cy="2193878"/>
           </a:xfrm>
         </p:spPr>
         <p:txBody>
@@ -5160,11 +6089,18 @@
           </a:bodyPr>
           <a:lstStyle/>
           <a:p>
+            <a:pPr marL="342900" indent="-342900">
+              <a:buChar char="•"/>
+            </a:pPr>
             <a:r>
               <a:rPr lang="en-US" sz="2400" dirty="0"/>
-              <a:t>Community of color over time has changed at a higher magnitude at Dauphin County</a:t>
-            </a:r>
-            <a:endParaRPr lang="en-US" dirty="0"/>
+              <a:t>Community of color over time has </a:t>
+            </a:r>
+            <a:r>
+              <a:rPr lang="en-US" sz="2400"/>
+              <a:t>changed more in at Dauphin County</a:t>
+            </a:r>
+            <a:endParaRPr lang="en-US"/>
           </a:p>
         </p:txBody>
       </p:sp>
@@ -5182,7 +6118,7 @@
         </p:nvSpPr>
         <p:spPr>
           <a:xfrm>
-            <a:off x="4053840" y="5908040"/>
+            <a:off x="6567303" y="5748816"/>
             <a:ext cx="4094480" cy="523220"/>
           </a:xfrm>
           <a:prstGeom prst="rect">
@@ -5200,15 +6136,42 @@
           <a:lstStyle/>
           <a:p>
             <a:r>
-              <a:rPr lang="en-US" sz="1400" baseline="0">
+              <a:rPr lang="en-US" sz="1400" baseline="0" dirty="0">
                 <a:solidFill>
                   <a:srgbClr val="000000"/>
                 </a:solidFill>
                 <a:latin typeface="Avenir Next LT Pro"/>
               </a:rPr>
-              <a:t>Previous SQL Query and Metabase to Visualize</a:t>
-            </a:r>
-            <a:endParaRPr lang="en-US" sz="1400">
+              <a:t>Previous SQL Query and </a:t>
+            </a:r>
+            <a:r>
+              <a:rPr lang="en-US" sz="1400" dirty="0" err="1">
+                <a:solidFill>
+                  <a:srgbClr val="000000"/>
+                </a:solidFill>
+                <a:latin typeface="Avenir Next LT Pro"/>
+              </a:rPr>
+              <a:t>Pyth</a:t>
+            </a:r>
+            <a:r>
+              <a:rPr lang="en-US" sz="1400" dirty="0">
+                <a:solidFill>
+                  <a:srgbClr val="000000"/>
+                </a:solidFill>
+                <a:latin typeface="Avenir Next LT Pro"/>
+              </a:rPr>
+              <a:t>on </a:t>
+            </a:r>
+            <a:r>
+              <a:rPr lang="en-US" sz="1400" baseline="0" dirty="0">
+                <a:solidFill>
+                  <a:srgbClr val="000000"/>
+                </a:solidFill>
+                <a:latin typeface="Avenir Next LT Pro"/>
+              </a:rPr>
+              <a:t>to Visualize</a:t>
+            </a:r>
+            <a:endParaRPr lang="en-US" sz="1400" dirty="0">
               <a:solidFill>
                 <a:srgbClr val="000000"/>
               </a:solidFill>
@@ -5228,10 +6191,10 @@
       </p:sp>
       <p:pic>
         <p:nvPicPr>
-          <p:cNvPr id="3" name="Picture 2" descr="A screenshot of a computer&#10;&#10;AI-generated content may be incorrect.">
-            <a:extLst>
-              <a:ext uri="{FF2B5EF4-FFF2-40B4-BE49-F238E27FC236}">
-                <a16:creationId xmlns:a16="http://schemas.microsoft.com/office/drawing/2014/main" id="{2FF81335-344E-5797-7D6E-D1EA5BD59E6B}"/>
+          <p:cNvPr id="4" name="Picture 3" descr="A graph of different colored squares&#10;&#10;AI-generated content may be incorrect.">
+            <a:extLst>
+              <a:ext uri="{FF2B5EF4-FFF2-40B4-BE49-F238E27FC236}">
+                <a16:creationId xmlns:a16="http://schemas.microsoft.com/office/drawing/2014/main" id="{0289E7BE-C841-6325-4FDB-332043A6B0A9}"/>
               </a:ext>
             </a:extLst>
           </p:cNvPr>
@@ -5248,38 +6211,8 @@
         </p:blipFill>
         <p:spPr>
           <a:xfrm>
-            <a:off x="4276918" y="3610640"/>
-            <a:ext cx="7752522" cy="1701852"/>
-          </a:xfrm>
-          <a:prstGeom prst="rect">
-            <a:avLst/>
-          </a:prstGeom>
-        </p:spPr>
-      </p:pic>
-      <p:pic>
-        <p:nvPicPr>
-          <p:cNvPr id="5" name="Picture 4">
-            <a:extLst>
-              <a:ext uri="{FF2B5EF4-FFF2-40B4-BE49-F238E27FC236}">
-                <a16:creationId xmlns:a16="http://schemas.microsoft.com/office/drawing/2014/main" id="{A45375E0-2E88-5CC0-149A-20A7C335C4E6}"/>
-              </a:ext>
-            </a:extLst>
-          </p:cNvPr>
-          <p:cNvPicPr>
-            <a:picLocks noChangeAspect="1"/>
-          </p:cNvPicPr>
-          <p:nvPr/>
-        </p:nvPicPr>
-        <p:blipFill>
-          <a:blip r:embed="rId3"/>
-          <a:stretch>
-            <a:fillRect/>
-          </a:stretch>
-        </p:blipFill>
-        <p:spPr>
-          <a:xfrm>
-            <a:off x="5868670" y="318"/>
-            <a:ext cx="6327140" cy="3250565"/>
+            <a:off x="4414495" y="1182804"/>
+            <a:ext cx="7775786" cy="4560628"/>
           </a:xfrm>
           <a:prstGeom prst="rect">
             <a:avLst/>
@@ -5290,938 +6223,6 @@
     <p:extLst>
       <p:ext uri="{BB962C8B-B14F-4D97-AF65-F5344CB8AC3E}">
         <p14:creationId xmlns:p14="http://schemas.microsoft.com/office/powerpoint/2010/main" val="2973443148"/>
-      </p:ext>
-    </p:extLst>
-  </p:cSld>
-  <p:clrMapOvr>
-    <a:masterClrMapping/>
-  </p:clrMapOvr>
-</p:sld>
-</file>
-
-<file path=ppt/slides/slide13.xml><?xml version="1.0" encoding="utf-8"?>
-<p:sld xmlns:a="http://schemas.openxmlformats.org/drawingml/2006/main" xmlns:r="http://schemas.openxmlformats.org/officeDocument/2006/relationships" xmlns:p="http://schemas.openxmlformats.org/presentationml/2006/main">
-  <p:cSld>
-    <p:spTree>
-      <p:nvGrpSpPr>
-        <p:cNvPr id="1" name="">
-          <a:extLst>
-            <a:ext uri="{FF2B5EF4-FFF2-40B4-BE49-F238E27FC236}">
-              <a16:creationId xmlns:a16="http://schemas.microsoft.com/office/drawing/2014/main" id="{5F5C5218-E8EF-D876-5613-956F0BD3A686}"/>
-            </a:ext>
-          </a:extLst>
-        </p:cNvPr>
-        <p:cNvGrpSpPr/>
-        <p:nvPr/>
-      </p:nvGrpSpPr>
-      <p:grpSpPr>
-        <a:xfrm>
-          <a:off x="0" y="0"/>
-          <a:ext cx="0" cy="0"/>
-          <a:chOff x="0" y="0"/>
-          <a:chExt cx="0" cy="0"/>
-        </a:xfrm>
-      </p:grpSpPr>
-      <p:sp>
-        <p:nvSpPr>
-          <p:cNvPr id="2" name="Title 1">
-            <a:extLst>
-              <a:ext uri="{FF2B5EF4-FFF2-40B4-BE49-F238E27FC236}">
-                <a16:creationId xmlns:a16="http://schemas.microsoft.com/office/drawing/2014/main" id="{ADDE8E68-8F19-7F6E-5477-CB65F755B803}"/>
-              </a:ext>
-            </a:extLst>
-          </p:cNvPr>
-          <p:cNvSpPr>
-            <a:spLocks noGrp="1"/>
-          </p:cNvSpPr>
-          <p:nvPr>
-            <p:ph type="title"/>
-          </p:nvPr>
-        </p:nvSpPr>
-        <p:spPr>
-          <a:xfrm>
-            <a:off x="1318755" y="457200"/>
-            <a:ext cx="10414602" cy="1921434"/>
-          </a:xfrm>
-        </p:spPr>
-        <p:txBody>
-          <a:bodyPr vert="horz" lIns="0" tIns="0" rIns="0" bIns="0" rtlCol="0" anchor="ctr">
-            <a:normAutofit/>
-          </a:bodyPr>
-          <a:lstStyle/>
-          <a:p>
-            <a:r>
-              <a:rPr lang="en-US" sz="3000" dirty="0">
-                <a:solidFill>
-                  <a:schemeClr val="accent5"/>
-                </a:solidFill>
-              </a:rPr>
-              <a:t>Consideration </a:t>
-            </a:r>
-            <a:r>
-              <a:rPr lang="en-US" sz="3000">
-                <a:solidFill>
-                  <a:schemeClr val="accent5"/>
-                </a:solidFill>
-              </a:rPr>
-              <a:t>for the future:</a:t>
-            </a:r>
-            <a:endParaRPr lang="en-US" sz="3000" dirty="0">
-              <a:solidFill>
-                <a:schemeClr val="accent5"/>
-              </a:solidFill>
-            </a:endParaRPr>
-          </a:p>
-        </p:txBody>
-      </p:sp>
-      <p:sp>
-        <p:nvSpPr>
-          <p:cNvPr id="3" name="Content Placeholder 2">
-            <a:extLst>
-              <a:ext uri="{FF2B5EF4-FFF2-40B4-BE49-F238E27FC236}">
-                <a16:creationId xmlns:a16="http://schemas.microsoft.com/office/drawing/2014/main" id="{1FCD9BEA-0851-7546-185C-46EBA1BA03EC}"/>
-              </a:ext>
-            </a:extLst>
-          </p:cNvPr>
-          <p:cNvSpPr>
-            <a:spLocks noGrp="1"/>
-          </p:cNvSpPr>
-          <p:nvPr>
-            <p:ph idx="1"/>
-          </p:nvPr>
-        </p:nvSpPr>
-        <p:spPr>
-          <a:xfrm>
-            <a:off x="4965192" y="1692207"/>
-            <a:ext cx="6729984" cy="4114233"/>
-          </a:xfrm>
-        </p:spPr>
-        <p:txBody>
-          <a:bodyPr vert="horz" lIns="91440" tIns="45720" rIns="91440" bIns="45720" rtlCol="0" anchor="t">
-            <a:normAutofit/>
-          </a:bodyPr>
-          <a:lstStyle/>
-          <a:p>
-            <a:pPr marL="342900" indent="-342900"/>
-            <a:endParaRPr lang="en-US" sz="2400" dirty="0"/>
-          </a:p>
-          <a:p>
-            <a:endParaRPr lang="en-US" sz="2400" dirty="0"/>
-          </a:p>
-        </p:txBody>
-      </p:sp>
-      <p:sp>
-        <p:nvSpPr>
-          <p:cNvPr id="4" name="Text Placeholder 3">
-            <a:extLst>
-              <a:ext uri="{FF2B5EF4-FFF2-40B4-BE49-F238E27FC236}">
-                <a16:creationId xmlns:a16="http://schemas.microsoft.com/office/drawing/2014/main" id="{894F4232-EB98-D771-7383-0D6127834C21}"/>
-              </a:ext>
-            </a:extLst>
-          </p:cNvPr>
-          <p:cNvSpPr>
-            <a:spLocks noGrp="1"/>
-          </p:cNvSpPr>
-          <p:nvPr>
-            <p:ph type="body" sz="half" idx="2"/>
-          </p:nvPr>
-        </p:nvSpPr>
-        <p:spPr>
-          <a:xfrm>
-            <a:off x="1315720" y="3431245"/>
-            <a:ext cx="3099816" cy="2539220"/>
-          </a:xfrm>
-        </p:spPr>
-        <p:txBody>
-          <a:bodyPr vert="horz" lIns="91440" tIns="45720" rIns="91440" bIns="45720" rtlCol="0" anchor="t">
-            <a:noAutofit/>
-          </a:bodyPr>
-          <a:lstStyle/>
-          <a:p>
-            <a:r>
-              <a:rPr lang="en-US" sz="2400" b="1" dirty="0">
-                <a:solidFill>
-                  <a:schemeClr val="accent5"/>
-                </a:solidFill>
-                <a:latin typeface="Aptos"/>
-              </a:rPr>
-              <a:t>What would be done with more time?</a:t>
-            </a:r>
-            <a:endParaRPr lang="en-US" sz="2400" b="1">
-              <a:solidFill>
-                <a:schemeClr val="accent5"/>
-              </a:solidFill>
-              <a:latin typeface="Aptos"/>
-            </a:endParaRPr>
-          </a:p>
-          <a:p>
-            <a:r>
-              <a:rPr lang="en-US" sz="2400" b="1" dirty="0">
-                <a:solidFill>
-                  <a:schemeClr val="accent5"/>
-                </a:solidFill>
-                <a:latin typeface="Aptos"/>
-              </a:rPr>
-              <a:t>What would be changed </a:t>
-            </a:r>
-            <a:r>
-              <a:rPr lang="en-US" sz="2400" b="1">
-                <a:solidFill>
-                  <a:schemeClr val="accent5"/>
-                </a:solidFill>
-                <a:latin typeface="Aptos"/>
-              </a:rPr>
-              <a:t>if I</a:t>
-            </a:r>
-            <a:r>
-              <a:rPr lang="en-US" sz="2400" b="1" dirty="0">
-                <a:solidFill>
-                  <a:schemeClr val="accent5"/>
-                </a:solidFill>
-                <a:latin typeface="Aptos"/>
-              </a:rPr>
-              <a:t> started over?</a:t>
-            </a:r>
-            <a:endParaRPr lang="en-US" dirty="0">
-              <a:solidFill>
-                <a:schemeClr val="accent5"/>
-              </a:solidFill>
-            </a:endParaRPr>
-          </a:p>
-          <a:p>
-            <a:endParaRPr lang="en-US" dirty="0">
-              <a:latin typeface="Aptos"/>
-            </a:endParaRPr>
-          </a:p>
-        </p:txBody>
-      </p:sp>
-      <p:sp>
-        <p:nvSpPr>
-          <p:cNvPr id="5" name="TextBox 4">
-            <a:extLst>
-              <a:ext uri="{FF2B5EF4-FFF2-40B4-BE49-F238E27FC236}">
-                <a16:creationId xmlns:a16="http://schemas.microsoft.com/office/drawing/2014/main" id="{8673A58F-61A3-3FC8-E7A8-66D180CA431F}"/>
-              </a:ext>
-            </a:extLst>
-          </p:cNvPr>
-          <p:cNvSpPr txBox="1"/>
-          <p:nvPr/>
-        </p:nvSpPr>
-        <p:spPr>
-          <a:xfrm>
-            <a:off x="4940300" y="2159000"/>
-            <a:ext cx="6464299" cy="2308324"/>
-          </a:xfrm>
-          <a:prstGeom prst="rect">
-            <a:avLst/>
-          </a:prstGeom>
-          <a:noFill/>
-        </p:spPr>
-        <p:txBody>
-          <a:bodyPr rot="0" spcFirstLastPara="0" vertOverflow="overflow" horzOverflow="overflow" vert="horz" wrap="square" lIns="91440" tIns="45720" rIns="91440" bIns="45720" numCol="1" spcCol="0" rtlCol="0" fromWordArt="0" anchor="t" anchorCtr="0" forceAA="0" compatLnSpc="1">
-            <a:prstTxWarp prst="textNoShape">
-              <a:avLst/>
-            </a:prstTxWarp>
-            <a:spAutoFit/>
-          </a:bodyPr>
-          <a:lstStyle/>
-          <a:p>
-            <a:pPr marL="285750" indent="-285750">
-              <a:buFont typeface="Arial"/>
-              <a:buChar char="•"/>
-            </a:pPr>
-            <a:r>
-              <a:rPr lang="en-US"/>
-              <a:t>I would have like to figure out to combine of census data throughout the years</a:t>
-            </a:r>
-          </a:p>
-          <a:p>
-            <a:pPr marL="285750" indent="-285750">
-              <a:buFont typeface="Arial"/>
-              <a:buChar char="•"/>
-            </a:pPr>
-            <a:r>
-              <a:rPr lang="en-US" dirty="0"/>
-              <a:t>I would have liked to do more of the major cities of </a:t>
-            </a:r>
-            <a:r>
-              <a:rPr lang="en-US"/>
-              <a:t>Pennsylvania</a:t>
-            </a:r>
-            <a:endParaRPr lang="en-US" dirty="0"/>
-          </a:p>
-          <a:p>
-            <a:pPr marL="285750" indent="-285750">
-              <a:buFont typeface="Arial"/>
-              <a:buChar char="•"/>
-            </a:pPr>
-            <a:r>
-              <a:rPr lang="en-US" dirty="0"/>
-              <a:t>Utilized shapefiles or </a:t>
-            </a:r>
-            <a:r>
-              <a:rPr lang="en-US"/>
-              <a:t>raster. </a:t>
-            </a:r>
-          </a:p>
-          <a:p>
-            <a:pPr marL="285750" indent="-285750">
-              <a:buFont typeface="Arial"/>
-              <a:buChar char="•"/>
-            </a:pPr>
-            <a:r>
-              <a:rPr lang="en-US" dirty="0"/>
-              <a:t>I would have like to gather more ge</a:t>
-            </a:r>
-            <a:r>
-              <a:rPr lang="en-US"/>
-              <a:t>ographic data to create a map</a:t>
-            </a:r>
-          </a:p>
-          <a:p>
-            <a:pPr marL="742950" lvl="1" indent="-285750">
-              <a:buFont typeface="Courier New"/>
-              <a:buChar char="o"/>
-            </a:pPr>
-            <a:r>
-              <a:rPr lang="en-US"/>
-              <a:t>Required more than 2 geographic markers</a:t>
-            </a:r>
-            <a:endParaRPr lang="en-US" dirty="0"/>
-          </a:p>
-        </p:txBody>
-      </p:sp>
-    </p:spTree>
-    <p:extLst>
-      <p:ext uri="{BB962C8B-B14F-4D97-AF65-F5344CB8AC3E}">
-        <p14:creationId xmlns:p14="http://schemas.microsoft.com/office/powerpoint/2010/main" val="528807178"/>
-      </p:ext>
-    </p:extLst>
-  </p:cSld>
-  <p:clrMapOvr>
-    <a:masterClrMapping/>
-  </p:clrMapOvr>
-</p:sld>
-</file>
-
-<file path=ppt/slides/slide14.xml><?xml version="1.0" encoding="utf-8"?>
-<p:sld xmlns:a="http://schemas.openxmlformats.org/drawingml/2006/main" xmlns:r="http://schemas.openxmlformats.org/officeDocument/2006/relationships" xmlns:p="http://schemas.openxmlformats.org/presentationml/2006/main">
-  <p:cSld>
-    <p:spTree>
-      <p:nvGrpSpPr>
-        <p:cNvPr id="1" name="">
-          <a:extLst>
-            <a:ext uri="{FF2B5EF4-FFF2-40B4-BE49-F238E27FC236}">
-              <a16:creationId xmlns:a16="http://schemas.microsoft.com/office/drawing/2014/main" id="{DA2E7C99-F63A-4413-737C-24E30AFA225D}"/>
-            </a:ext>
-          </a:extLst>
-        </p:cNvPr>
-        <p:cNvGrpSpPr/>
-        <p:nvPr/>
-      </p:nvGrpSpPr>
-      <p:grpSpPr>
-        <a:xfrm>
-          <a:off x="0" y="0"/>
-          <a:ext cx="0" cy="0"/>
-          <a:chOff x="0" y="0"/>
-          <a:chExt cx="0" cy="0"/>
-        </a:xfrm>
-      </p:grpSpPr>
-      <p:sp>
-        <p:nvSpPr>
-          <p:cNvPr id="2" name="Title 1">
-            <a:extLst>
-              <a:ext uri="{FF2B5EF4-FFF2-40B4-BE49-F238E27FC236}">
-                <a16:creationId xmlns:a16="http://schemas.microsoft.com/office/drawing/2014/main" id="{A98A019B-FB01-1961-C642-035F0A39BCC1}"/>
-              </a:ext>
-            </a:extLst>
-          </p:cNvPr>
-          <p:cNvSpPr>
-            <a:spLocks noGrp="1"/>
-          </p:cNvSpPr>
-          <p:nvPr>
-            <p:ph type="title"/>
-          </p:nvPr>
-        </p:nvSpPr>
-        <p:spPr>
-          <a:xfrm>
-            <a:off x="1318755" y="457200"/>
-            <a:ext cx="10071166" cy="1921434"/>
-          </a:xfrm>
-        </p:spPr>
-        <p:txBody>
-          <a:bodyPr vert="horz" lIns="0" tIns="0" rIns="0" bIns="0" rtlCol="0" anchor="ctr">
-            <a:normAutofit/>
-          </a:bodyPr>
-          <a:lstStyle/>
-          <a:p>
-            <a:r>
-              <a:rPr lang="en-US" sz="3000" dirty="0">
-                <a:solidFill>
-                  <a:schemeClr val="accent5"/>
-                </a:solidFill>
-              </a:rPr>
-              <a:t>Consideration </a:t>
-            </a:r>
-            <a:r>
-              <a:rPr lang="en-US" sz="3000">
-                <a:solidFill>
-                  <a:schemeClr val="accent5"/>
-                </a:solidFill>
-              </a:rPr>
-              <a:t>for the future:</a:t>
-            </a:r>
-            <a:endParaRPr lang="en-US" sz="3000" dirty="0">
-              <a:solidFill>
-                <a:schemeClr val="accent5"/>
-              </a:solidFill>
-            </a:endParaRPr>
-          </a:p>
-        </p:txBody>
-      </p:sp>
-      <p:sp>
-        <p:nvSpPr>
-          <p:cNvPr id="3" name="Content Placeholder 2">
-            <a:extLst>
-              <a:ext uri="{FF2B5EF4-FFF2-40B4-BE49-F238E27FC236}">
-                <a16:creationId xmlns:a16="http://schemas.microsoft.com/office/drawing/2014/main" id="{2201BA4C-B433-0B16-858B-C44C61334057}"/>
-              </a:ext>
-            </a:extLst>
-          </p:cNvPr>
-          <p:cNvSpPr>
-            <a:spLocks noGrp="1"/>
-          </p:cNvSpPr>
-          <p:nvPr>
-            <p:ph idx="1"/>
-          </p:nvPr>
-        </p:nvSpPr>
-        <p:spPr>
-          <a:xfrm>
-            <a:off x="4965192" y="1881516"/>
-            <a:ext cx="6880611" cy="3924924"/>
-          </a:xfrm>
-        </p:spPr>
-        <p:txBody>
-          <a:bodyPr vert="horz" lIns="91440" tIns="45720" rIns="91440" bIns="45720" rtlCol="0" anchor="t">
-            <a:normAutofit/>
-          </a:bodyPr>
-          <a:lstStyle/>
-          <a:p>
-            <a:r>
-              <a:rPr lang="en-US" sz="2400" dirty="0" err="1"/>
-              <a:t>Geopandas</a:t>
-            </a:r>
-            <a:endParaRPr lang="en-US" dirty="0" err="1"/>
-          </a:p>
-          <a:p>
-            <a:pPr lvl="1">
-              <a:buFont typeface="Courier New" panose="020B0604020202020204" pitchFamily="34" charset="0"/>
-              <a:buChar char="o"/>
-            </a:pPr>
-            <a:r>
-              <a:rPr lang="en-US" sz="2000" dirty="0"/>
-              <a:t>To create a proper map using </a:t>
-            </a:r>
-            <a:r>
-              <a:rPr lang="en-US" sz="2000" dirty="0" err="1"/>
-              <a:t>geopandas</a:t>
-            </a:r>
-            <a:r>
-              <a:rPr lang="en-US" sz="2000" dirty="0"/>
-              <a:t> you need 3 or more points</a:t>
-            </a:r>
-          </a:p>
-          <a:p>
-            <a:r>
-              <a:rPr lang="en-US" sz="2400" dirty="0" err="1"/>
-              <a:t>Metabase</a:t>
-            </a:r>
-          </a:p>
-          <a:p>
-            <a:pPr lvl="1">
-              <a:buFont typeface="Courier New" panose="020B0604020202020204" pitchFamily="34" charset="0"/>
-              <a:buChar char="o"/>
-            </a:pPr>
-            <a:r>
-              <a:rPr lang="en-US" sz="2000"/>
-              <a:t>Bar graphs were a challenge due to the format of final data</a:t>
-            </a:r>
-            <a:endParaRPr lang="en-US" sz="2000" dirty="0"/>
-          </a:p>
-          <a:p>
-            <a:endParaRPr lang="en-US" sz="2400" dirty="0"/>
-          </a:p>
-          <a:p>
-            <a:endParaRPr lang="en-US" dirty="0"/>
-          </a:p>
-          <a:p>
-            <a:endParaRPr lang="en-US" dirty="0"/>
-          </a:p>
-        </p:txBody>
-      </p:sp>
-      <p:sp>
-        <p:nvSpPr>
-          <p:cNvPr id="4" name="Text Placeholder 3">
-            <a:extLst>
-              <a:ext uri="{FF2B5EF4-FFF2-40B4-BE49-F238E27FC236}">
-                <a16:creationId xmlns:a16="http://schemas.microsoft.com/office/drawing/2014/main" id="{B83FBE74-CD4D-5D6E-9CDF-3917C281B2C0}"/>
-              </a:ext>
-            </a:extLst>
-          </p:cNvPr>
-          <p:cNvSpPr>
-            <a:spLocks noGrp="1"/>
-          </p:cNvSpPr>
-          <p:nvPr>
-            <p:ph type="body" sz="half" idx="2"/>
-          </p:nvPr>
-        </p:nvSpPr>
-        <p:spPr>
-          <a:xfrm>
-            <a:off x="868680" y="3198628"/>
-            <a:ext cx="3099816" cy="2066544"/>
-          </a:xfrm>
-        </p:spPr>
-        <p:txBody>
-          <a:bodyPr vert="horz" lIns="91440" tIns="45720" rIns="91440" bIns="45720" rtlCol="0" anchor="t">
-            <a:normAutofit/>
-          </a:bodyPr>
-          <a:lstStyle/>
-          <a:p>
-            <a:r>
-              <a:rPr lang="en-US" sz="2400" b="1" i="0" u="none" strike="noStrike">
-                <a:solidFill>
-                  <a:schemeClr val="accent5"/>
-                </a:solidFill>
-                <a:effectLst/>
-                <a:latin typeface="Aptos"/>
-              </a:rPr>
-              <a:t>What was learned?</a:t>
-            </a:r>
-            <a:endParaRPr lang="en-US" sz="2400" b="1">
-              <a:solidFill>
-                <a:schemeClr val="accent5"/>
-              </a:solidFill>
-              <a:latin typeface="Aptos"/>
-            </a:endParaRPr>
-          </a:p>
-        </p:txBody>
-      </p:sp>
-    </p:spTree>
-    <p:extLst>
-      <p:ext uri="{BB962C8B-B14F-4D97-AF65-F5344CB8AC3E}">
-        <p14:creationId xmlns:p14="http://schemas.microsoft.com/office/powerpoint/2010/main" val="3085506092"/>
-      </p:ext>
-    </p:extLst>
-  </p:cSld>
-  <p:clrMapOvr>
-    <a:masterClrMapping/>
-  </p:clrMapOvr>
-</p:sld>
-</file>
-
-<file path=ppt/slides/slide15.xml><?xml version="1.0" encoding="utf-8"?>
-<p:sld xmlns:a="http://schemas.openxmlformats.org/drawingml/2006/main" xmlns:r="http://schemas.openxmlformats.org/officeDocument/2006/relationships" xmlns:p="http://schemas.openxmlformats.org/presentationml/2006/main">
-  <p:cSld>
-    <p:spTree>
-      <p:nvGrpSpPr>
-        <p:cNvPr id="1" name=""/>
-        <p:cNvGrpSpPr/>
-        <p:nvPr/>
-      </p:nvGrpSpPr>
-      <p:grpSpPr>
-        <a:xfrm>
-          <a:off x="0" y="0"/>
-          <a:ext cx="0" cy="0"/>
-          <a:chOff x="0" y="0"/>
-          <a:chExt cx="0" cy="0"/>
-        </a:xfrm>
-      </p:grpSpPr>
-      <p:sp>
-        <p:nvSpPr>
-          <p:cNvPr id="2" name="Title 1">
-            <a:extLst>
-              <a:ext uri="{FF2B5EF4-FFF2-40B4-BE49-F238E27FC236}">
-                <a16:creationId xmlns:a16="http://schemas.microsoft.com/office/drawing/2014/main" id="{5FFE3D98-DF18-8E02-CAF6-FF4AE3193D51}"/>
-              </a:ext>
-            </a:extLst>
-          </p:cNvPr>
-          <p:cNvSpPr>
-            <a:spLocks noGrp="1"/>
-          </p:cNvSpPr>
-          <p:nvPr>
-            <p:ph type="title"/>
-          </p:nvPr>
-        </p:nvSpPr>
-        <p:spPr/>
-        <p:txBody>
-          <a:bodyPr vert="horz" lIns="0" tIns="0" rIns="0" bIns="0" rtlCol="0" anchor="ctr">
-            <a:normAutofit/>
-          </a:bodyPr>
-          <a:lstStyle/>
-          <a:p>
-            <a:r>
-              <a:rPr lang="en-US" sz="3000">
-                <a:solidFill>
-                  <a:schemeClr val="accent5"/>
-                </a:solidFill>
-              </a:rPr>
-              <a:t>Citations</a:t>
-            </a:r>
-          </a:p>
-        </p:txBody>
-      </p:sp>
-      <p:sp>
-        <p:nvSpPr>
-          <p:cNvPr id="3" name="Content Placeholder 2">
-            <a:extLst>
-              <a:ext uri="{FF2B5EF4-FFF2-40B4-BE49-F238E27FC236}">
-                <a16:creationId xmlns:a16="http://schemas.microsoft.com/office/drawing/2014/main" id="{DD9891DF-336C-4944-35E7-F6EE75A8EFE3}"/>
-              </a:ext>
-            </a:extLst>
-          </p:cNvPr>
-          <p:cNvSpPr>
-            <a:spLocks noGrp="1"/>
-          </p:cNvSpPr>
-          <p:nvPr>
-            <p:ph idx="1"/>
-          </p:nvPr>
-        </p:nvSpPr>
-        <p:spPr/>
-        <p:txBody>
-          <a:bodyPr vert="horz" lIns="0" tIns="0" rIns="0" bIns="0" rtlCol="0" anchor="t">
-            <a:normAutofit/>
-          </a:bodyPr>
-          <a:lstStyle/>
-          <a:p>
-            <a:r>
-              <a:rPr lang="en-US" sz="1800">
-                <a:highlight>
-                  <a:srgbClr val="FFFFFF"/>
-                </a:highlight>
-                <a:latin typeface="Avenir Next LT Pro Light"/>
-                <a:cs typeface="Times New Roman"/>
-              </a:rPr>
-              <a:t>Harrisburg-Lancaster-Lebanon-York, PA DMR - select your maps. </a:t>
-            </a:r>
-            <a:r>
-              <a:rPr lang="en-US" sz="1800" dirty="0" err="1">
-                <a:highlight>
-                  <a:srgbClr val="FFFFFF"/>
-                </a:highlight>
-                <a:latin typeface="Avenir Next LT Pro Light"/>
-                <a:cs typeface="Times New Roman"/>
-              </a:rPr>
-              <a:t>MarketMAPS</a:t>
-            </a:r>
-            <a:r>
-              <a:rPr lang="en-US" sz="1800" dirty="0">
-                <a:highlight>
-                  <a:srgbClr val="FFFFFF"/>
-                </a:highlight>
-                <a:latin typeface="Avenir Next LT Pro Light"/>
-                <a:cs typeface="Times New Roman"/>
-              </a:rPr>
-              <a:t>. (n.d.). https://www.marketmaps.com/dmr-maps/harrisburg-lancaster-lebanon-york-pa.aspx </a:t>
-            </a:r>
-            <a:endParaRPr lang="en-US" sz="1800">
-              <a:latin typeface="Avenir Next LT Pro Light"/>
-            </a:endParaRPr>
-          </a:p>
-          <a:p>
-            <a:r>
-              <a:rPr lang="en-US" sz="1800">
-                <a:highlight>
-                  <a:srgbClr val="FFFFFF"/>
-                </a:highlight>
-                <a:latin typeface="Avenir Next LT Pro Light"/>
-                <a:cs typeface="Times New Roman"/>
-              </a:rPr>
-              <a:t>Li, D., &amp; Bou-Zeid, E. (2013). Synergistic interactions between urban heat islands and heat waves: The impact in cities is larger than the sum of its parts. </a:t>
-            </a:r>
-            <a:r>
-              <a:rPr lang="en-US" sz="1800" i="1">
-                <a:highlight>
-                  <a:srgbClr val="FFFFFF"/>
-                </a:highlight>
-                <a:latin typeface="Avenir Next LT Pro Light"/>
-                <a:cs typeface="Times New Roman"/>
-              </a:rPr>
-              <a:t>Journal of Applied Meteorology and Climatology</a:t>
-            </a:r>
-            <a:r>
-              <a:rPr lang="en-US" sz="1800">
-                <a:highlight>
-                  <a:srgbClr val="FFFFFF"/>
-                </a:highlight>
-                <a:latin typeface="Avenir Next LT Pro Light"/>
-                <a:cs typeface="Times New Roman"/>
-              </a:rPr>
-              <a:t>, </a:t>
-            </a:r>
-            <a:r>
-              <a:rPr lang="en-US" sz="1800" i="1">
-                <a:highlight>
-                  <a:srgbClr val="FFFFFF"/>
-                </a:highlight>
-                <a:latin typeface="Avenir Next LT Pro Light"/>
-                <a:cs typeface="Times New Roman"/>
-              </a:rPr>
-              <a:t>52</a:t>
-            </a:r>
-            <a:r>
-              <a:rPr lang="en-US" sz="1800">
-                <a:highlight>
-                  <a:srgbClr val="FFFFFF"/>
-                </a:highlight>
-                <a:latin typeface="Avenir Next LT Pro Light"/>
-                <a:cs typeface="Times New Roman"/>
-              </a:rPr>
-              <a:t>(9), 2051–2064. </a:t>
-            </a:r>
-            <a:r>
-              <a:rPr lang="en-US" sz="1800" u="sng" dirty="0">
-                <a:highlight>
-                  <a:srgbClr val="FFFFFF"/>
-                </a:highlight>
-                <a:latin typeface="Avenir Next LT Pro Light"/>
-                <a:cs typeface="Times New Roman"/>
-                <a:hlinkClick r:id="rId2"/>
-              </a:rPr>
-              <a:t>https://doi.org/10.1175/jamc-d-13-02.1</a:t>
-            </a:r>
-            <a:r>
-              <a:rPr lang="en-US" sz="1800" dirty="0">
-                <a:highlight>
-                  <a:srgbClr val="FFFFFF"/>
-                </a:highlight>
-                <a:latin typeface="Avenir Next LT Pro Light"/>
-                <a:cs typeface="Times New Roman"/>
-              </a:rPr>
-              <a:t> </a:t>
-            </a:r>
-            <a:endParaRPr lang="en-US" sz="1800">
-              <a:highlight>
-                <a:srgbClr val="C6C6C6"/>
-              </a:highlight>
-              <a:latin typeface="Avenir Next LT Pro Light"/>
-              <a:cs typeface="Times New Roman"/>
-            </a:endParaRPr>
-          </a:p>
-          <a:p>
-            <a:r>
-              <a:rPr lang="en-US" sz="1800">
-                <a:highlight>
-                  <a:srgbClr val="FFFFFF"/>
-                </a:highlight>
-                <a:latin typeface="Avenir Next LT Pro Light"/>
-                <a:ea typeface="+mn-lt"/>
-                <a:cs typeface="Times New Roman"/>
-              </a:rPr>
-              <a:t>Mapmaker: Redlining in the United States. Education. (n.d.). </a:t>
-            </a:r>
-            <a:r>
-              <a:rPr lang="en-US" sz="1800" dirty="0">
-                <a:highlight>
-                  <a:srgbClr val="FFFFFF"/>
-                </a:highlight>
-                <a:latin typeface="Avenir Next LT Pro Light"/>
-                <a:ea typeface="+mn-lt"/>
-                <a:cs typeface="Times New Roman"/>
-              </a:rPr>
-              <a:t>https://education.nationalgeographic.org/resource/mapmaker-redlining-united-states/ </a:t>
-            </a:r>
-            <a:endParaRPr lang="en-US" sz="1800" dirty="0">
-              <a:highlight>
-                <a:srgbClr val="FFFFFF"/>
-              </a:highlight>
-              <a:latin typeface="Avenir Next LT Pro Light"/>
-              <a:cs typeface="Times New Roman"/>
-            </a:endParaRPr>
-          </a:p>
-          <a:p>
-            <a:r>
-              <a:rPr lang="en-US" sz="1800">
-                <a:highlight>
-                  <a:srgbClr val="FFFFFF"/>
-                </a:highlight>
-                <a:latin typeface="Avenir Next LT Pro Light"/>
-                <a:cs typeface="Times New Roman"/>
-              </a:rPr>
-              <a:t>Mirzaei, P. A., &amp; Haghighat, F. (2010). Approaches to study urban heat island – abilities and limitations. </a:t>
-            </a:r>
-            <a:r>
-              <a:rPr lang="en-US" sz="1800" i="1">
-                <a:highlight>
-                  <a:srgbClr val="FFFFFF"/>
-                </a:highlight>
-                <a:latin typeface="Avenir Next LT Pro Light"/>
-                <a:cs typeface="Times New Roman"/>
-              </a:rPr>
-              <a:t>Building and Environment</a:t>
-            </a:r>
-            <a:r>
-              <a:rPr lang="en-US" sz="1800">
-                <a:highlight>
-                  <a:srgbClr val="FFFFFF"/>
-                </a:highlight>
-                <a:latin typeface="Avenir Next LT Pro Light"/>
-                <a:cs typeface="Times New Roman"/>
-              </a:rPr>
-              <a:t>, </a:t>
-            </a:r>
-            <a:r>
-              <a:rPr lang="en-US" sz="1800" i="1">
-                <a:highlight>
-                  <a:srgbClr val="FFFFFF"/>
-                </a:highlight>
-                <a:latin typeface="Avenir Next LT Pro Light"/>
-                <a:cs typeface="Times New Roman"/>
-              </a:rPr>
-              <a:t>45</a:t>
-            </a:r>
-            <a:r>
-              <a:rPr lang="en-US" sz="1800">
-                <a:highlight>
-                  <a:srgbClr val="FFFFFF"/>
-                </a:highlight>
-                <a:latin typeface="Avenir Next LT Pro Light"/>
-                <a:cs typeface="Times New Roman"/>
-              </a:rPr>
-              <a:t>(10), 2192–2201. </a:t>
-            </a:r>
-            <a:r>
-              <a:rPr lang="en-US" sz="1800" u="sng" dirty="0">
-                <a:highlight>
-                  <a:srgbClr val="FFFFFF"/>
-                </a:highlight>
-                <a:latin typeface="Avenir Next LT Pro Light"/>
-                <a:cs typeface="Times New Roman"/>
-                <a:hlinkClick r:id="rId3"/>
-              </a:rPr>
-              <a:t>https://doi.org/10.1016/j.buildenv.2010.04.001</a:t>
-            </a:r>
-            <a:r>
-              <a:rPr lang="en-US" sz="1800" dirty="0">
-                <a:highlight>
-                  <a:srgbClr val="FFFFFF"/>
-                </a:highlight>
-                <a:latin typeface="Avenir Next LT Pro Light"/>
-                <a:cs typeface="Times New Roman"/>
-              </a:rPr>
-              <a:t> </a:t>
-            </a:r>
-            <a:endParaRPr lang="en-US" sz="1800" dirty="0">
-              <a:highlight>
-                <a:srgbClr val="C6C6C6"/>
-              </a:highlight>
-              <a:latin typeface="Avenir Next LT Pro Light"/>
-              <a:cs typeface="Times New Roman"/>
-            </a:endParaRPr>
-          </a:p>
-          <a:p>
-            <a:endParaRPr lang="en-US" sz="1800" dirty="0">
-              <a:highlight>
-                <a:srgbClr val="FFFFFF"/>
-              </a:highlight>
-              <a:latin typeface="Times New Roman"/>
-              <a:cs typeface="Times New Roman"/>
-            </a:endParaRPr>
-          </a:p>
-          <a:p>
-            <a:endParaRPr lang="en-US" dirty="0"/>
-          </a:p>
-        </p:txBody>
-      </p:sp>
-      <p:sp>
-        <p:nvSpPr>
-          <p:cNvPr id="4" name="Date Placeholder 3">
-            <a:extLst>
-              <a:ext uri="{FF2B5EF4-FFF2-40B4-BE49-F238E27FC236}">
-                <a16:creationId xmlns:a16="http://schemas.microsoft.com/office/drawing/2014/main" id="{5983E68B-3E0B-337D-7880-89DD3B3F3CB5}"/>
-              </a:ext>
-            </a:extLst>
-          </p:cNvPr>
-          <p:cNvSpPr>
-            <a:spLocks noGrp="1"/>
-          </p:cNvSpPr>
-          <p:nvPr>
-            <p:ph type="dt" sz="half" idx="10"/>
-          </p:nvPr>
-        </p:nvSpPr>
-        <p:spPr/>
-        <p:txBody>
-          <a:bodyPr/>
-          <a:lstStyle/>
-          <a:p>
-            <a:fld id="{73083E24-65F8-4E30-9D74-DC5F7C974220}" type="datetime1">
-              <a:t>4/27/2026</a:t>
-            </a:fld>
-            <a:endParaRPr lang="en-US" dirty="0"/>
-          </a:p>
-        </p:txBody>
-      </p:sp>
-      <p:sp>
-        <p:nvSpPr>
-          <p:cNvPr id="5" name="Footer Placeholder 4">
-            <a:extLst>
-              <a:ext uri="{FF2B5EF4-FFF2-40B4-BE49-F238E27FC236}">
-                <a16:creationId xmlns:a16="http://schemas.microsoft.com/office/drawing/2014/main" id="{6791913C-16C2-850F-AA40-727F3D145E5A}"/>
-              </a:ext>
-            </a:extLst>
-          </p:cNvPr>
-          <p:cNvSpPr>
-            <a:spLocks noGrp="1"/>
-          </p:cNvSpPr>
-          <p:nvPr>
-            <p:ph type="ftr" sz="quarter" idx="11"/>
-          </p:nvPr>
-        </p:nvSpPr>
-        <p:spPr/>
-        <p:txBody>
-          <a:bodyPr/>
-          <a:lstStyle/>
-          <a:p>
-            <a:r>
-              <a:rPr lang="en-US" dirty="0"/>
-              <a:t>
-              </a:t>
-            </a:r>
-          </a:p>
-        </p:txBody>
-      </p:sp>
-      <p:sp>
-        <p:nvSpPr>
-          <p:cNvPr id="6" name="Slide Number Placeholder 5">
-            <a:extLst>
-              <a:ext uri="{FF2B5EF4-FFF2-40B4-BE49-F238E27FC236}">
-                <a16:creationId xmlns:a16="http://schemas.microsoft.com/office/drawing/2014/main" id="{ED7D1710-0883-3DA4-753E-FD7C54DFB2EC}"/>
-              </a:ext>
-            </a:extLst>
-          </p:cNvPr>
-          <p:cNvSpPr>
-            <a:spLocks noGrp="1"/>
-          </p:cNvSpPr>
-          <p:nvPr>
-            <p:ph type="sldNum" sz="quarter" idx="12"/>
-          </p:nvPr>
-        </p:nvSpPr>
-        <p:spPr/>
-        <p:txBody>
-          <a:bodyPr/>
-          <a:lstStyle/>
-          <a:p>
-            <a:fld id="{017DE1FC-E54A-4B87-A814-263D1E8654B2}" type="slidenum">
-              <a:rPr lang="en-US" dirty="0"/>
-              <a:t>15</a:t>
-            </a:fld>
-            <a:endParaRPr lang="en-US" dirty="0"/>
-          </a:p>
-        </p:txBody>
-      </p:sp>
-    </p:spTree>
-    <p:extLst>
-      <p:ext uri="{BB962C8B-B14F-4D97-AF65-F5344CB8AC3E}">
-        <p14:creationId xmlns:p14="http://schemas.microsoft.com/office/powerpoint/2010/main" val="3357628369"/>
       </p:ext>
     </p:extLst>
   </p:cSld>
@@ -6253,6 +6254,419 @@
           <p:cNvPr id="2" name="Title 1">
             <a:extLst>
               <a:ext uri="{FF2B5EF4-FFF2-40B4-BE49-F238E27FC236}">
+                <a16:creationId xmlns:a16="http://schemas.microsoft.com/office/drawing/2014/main" id="{5FFE3D98-DF18-8E02-CAF6-FF4AE3193D51}"/>
+              </a:ext>
+            </a:extLst>
+          </p:cNvPr>
+          <p:cNvSpPr>
+            <a:spLocks noGrp="1"/>
+          </p:cNvSpPr>
+          <p:nvPr>
+            <p:ph type="title"/>
+          </p:nvPr>
+        </p:nvSpPr>
+        <p:spPr/>
+        <p:txBody>
+          <a:bodyPr vert="horz" lIns="0" tIns="0" rIns="0" bIns="0" rtlCol="0" anchor="ctr">
+            <a:normAutofit/>
+          </a:bodyPr>
+          <a:lstStyle/>
+          <a:p>
+            <a:r>
+              <a:rPr lang="en-US" sz="3000">
+                <a:solidFill>
+                  <a:schemeClr val="accent5"/>
+                </a:solidFill>
+              </a:rPr>
+              <a:t>Citations</a:t>
+            </a:r>
+          </a:p>
+        </p:txBody>
+      </p:sp>
+      <p:sp>
+        <p:nvSpPr>
+          <p:cNvPr id="3" name="Content Placeholder 2">
+            <a:extLst>
+              <a:ext uri="{FF2B5EF4-FFF2-40B4-BE49-F238E27FC236}">
+                <a16:creationId xmlns:a16="http://schemas.microsoft.com/office/drawing/2014/main" id="{DD9891DF-336C-4944-35E7-F6EE75A8EFE3}"/>
+              </a:ext>
+            </a:extLst>
+          </p:cNvPr>
+          <p:cNvSpPr>
+            <a:spLocks noGrp="1"/>
+          </p:cNvSpPr>
+          <p:nvPr>
+            <p:ph idx="1"/>
+          </p:nvPr>
+        </p:nvSpPr>
+        <p:spPr/>
+        <p:txBody>
+          <a:bodyPr vert="horz" lIns="0" tIns="0" rIns="0" bIns="0" rtlCol="0" anchor="t">
+            <a:normAutofit/>
+          </a:bodyPr>
+          <a:lstStyle/>
+          <a:p>
+            <a:r>
+              <a:rPr lang="en-US" sz="1800">
+                <a:highlight>
+                  <a:srgbClr val="FFFFFF"/>
+                </a:highlight>
+                <a:latin typeface="Avenir Next LT Pro Light"/>
+                <a:cs typeface="Times New Roman"/>
+              </a:rPr>
+              <a:t>Harrisburg-Lancaster-Lebanon-York, PA DMR - select your maps. </a:t>
+            </a:r>
+            <a:r>
+              <a:rPr lang="en-US" sz="1800" dirty="0" err="1">
+                <a:highlight>
+                  <a:srgbClr val="FFFFFF"/>
+                </a:highlight>
+                <a:latin typeface="Avenir Next LT Pro Light"/>
+                <a:cs typeface="Times New Roman"/>
+              </a:rPr>
+              <a:t>MarketMAPS</a:t>
+            </a:r>
+            <a:r>
+              <a:rPr lang="en-US" sz="1800" dirty="0">
+                <a:highlight>
+                  <a:srgbClr val="FFFFFF"/>
+                </a:highlight>
+                <a:latin typeface="Avenir Next LT Pro Light"/>
+                <a:cs typeface="Times New Roman"/>
+              </a:rPr>
+              <a:t>. (n.d.). https://www.marketmaps.com/dmr-maps/harrisburg-lancaster-lebanon-york-pa.aspx </a:t>
+            </a:r>
+            <a:endParaRPr lang="en-US" sz="1800">
+              <a:latin typeface="Avenir Next LT Pro Light"/>
+            </a:endParaRPr>
+          </a:p>
+          <a:p>
+            <a:r>
+              <a:rPr lang="en-US" sz="1800">
+                <a:highlight>
+                  <a:srgbClr val="FFFFFF"/>
+                </a:highlight>
+                <a:latin typeface="Avenir Next LT Pro Light"/>
+                <a:cs typeface="Times New Roman"/>
+              </a:rPr>
+              <a:t>Li, D., &amp; Bou-Zeid, E. (2013). Synergistic interactions between urban heat islands and heat waves: The impact in cities is larger than the sum of its parts. </a:t>
+            </a:r>
+            <a:r>
+              <a:rPr lang="en-US" sz="1800" i="1">
+                <a:highlight>
+                  <a:srgbClr val="FFFFFF"/>
+                </a:highlight>
+                <a:latin typeface="Avenir Next LT Pro Light"/>
+                <a:cs typeface="Times New Roman"/>
+              </a:rPr>
+              <a:t>Journal of Applied Meteorology and Climatology</a:t>
+            </a:r>
+            <a:r>
+              <a:rPr lang="en-US" sz="1800">
+                <a:highlight>
+                  <a:srgbClr val="FFFFFF"/>
+                </a:highlight>
+                <a:latin typeface="Avenir Next LT Pro Light"/>
+                <a:cs typeface="Times New Roman"/>
+              </a:rPr>
+              <a:t>, </a:t>
+            </a:r>
+            <a:r>
+              <a:rPr lang="en-US" sz="1800" i="1">
+                <a:highlight>
+                  <a:srgbClr val="FFFFFF"/>
+                </a:highlight>
+                <a:latin typeface="Avenir Next LT Pro Light"/>
+                <a:cs typeface="Times New Roman"/>
+              </a:rPr>
+              <a:t>52</a:t>
+            </a:r>
+            <a:r>
+              <a:rPr lang="en-US" sz="1800">
+                <a:highlight>
+                  <a:srgbClr val="FFFFFF"/>
+                </a:highlight>
+                <a:latin typeface="Avenir Next LT Pro Light"/>
+                <a:cs typeface="Times New Roman"/>
+              </a:rPr>
+              <a:t>(9), 2051–2064. </a:t>
+            </a:r>
+            <a:r>
+              <a:rPr lang="en-US" sz="1800" u="sng" dirty="0">
+                <a:highlight>
+                  <a:srgbClr val="FFFFFF"/>
+                </a:highlight>
+                <a:latin typeface="Avenir Next LT Pro Light"/>
+                <a:cs typeface="Times New Roman"/>
+                <a:hlinkClick r:id="rId2"/>
+              </a:rPr>
+              <a:t>https://doi.org/10.1175/jamc-d-13-02.1</a:t>
+            </a:r>
+            <a:r>
+              <a:rPr lang="en-US" sz="1800" dirty="0">
+                <a:highlight>
+                  <a:srgbClr val="FFFFFF"/>
+                </a:highlight>
+                <a:latin typeface="Avenir Next LT Pro Light"/>
+                <a:cs typeface="Times New Roman"/>
+              </a:rPr>
+              <a:t> </a:t>
+            </a:r>
+            <a:endParaRPr lang="en-US" sz="1800">
+              <a:highlight>
+                <a:srgbClr val="C6C6C6"/>
+              </a:highlight>
+              <a:latin typeface="Avenir Next LT Pro Light"/>
+              <a:cs typeface="Times New Roman"/>
+            </a:endParaRPr>
+          </a:p>
+          <a:p>
+            <a:r>
+              <a:rPr lang="en-US" sz="1800">
+                <a:highlight>
+                  <a:srgbClr val="FFFFFF"/>
+                </a:highlight>
+                <a:latin typeface="Avenir Next LT Pro Light"/>
+                <a:ea typeface="+mn-lt"/>
+                <a:cs typeface="Times New Roman"/>
+              </a:rPr>
+              <a:t>Mapmaker: Redlining in the United States. Education. (n.d.). </a:t>
+            </a:r>
+            <a:r>
+              <a:rPr lang="en-US" sz="1800" dirty="0">
+                <a:highlight>
+                  <a:srgbClr val="FFFFFF"/>
+                </a:highlight>
+                <a:latin typeface="Avenir Next LT Pro Light"/>
+                <a:ea typeface="+mn-lt"/>
+                <a:cs typeface="Times New Roman"/>
+              </a:rPr>
+              <a:t>https://education.nationalgeographic.org/resource/mapmaker-redlining-united-states/ </a:t>
+            </a:r>
+            <a:endParaRPr lang="en-US" sz="1800" dirty="0">
+              <a:highlight>
+                <a:srgbClr val="FFFFFF"/>
+              </a:highlight>
+              <a:latin typeface="Avenir Next LT Pro Light"/>
+              <a:cs typeface="Times New Roman"/>
+            </a:endParaRPr>
+          </a:p>
+          <a:p>
+            <a:r>
+              <a:rPr lang="en-US" sz="1800">
+                <a:highlight>
+                  <a:srgbClr val="FFFFFF"/>
+                </a:highlight>
+                <a:latin typeface="Avenir Next LT Pro Light"/>
+                <a:cs typeface="Times New Roman"/>
+              </a:rPr>
+              <a:t>Mirzaei, P. A., &amp; Haghighat, F. (2010). Approaches to study urban heat island – abilities and limitations. </a:t>
+            </a:r>
+            <a:r>
+              <a:rPr lang="en-US" sz="1800" i="1">
+                <a:highlight>
+                  <a:srgbClr val="FFFFFF"/>
+                </a:highlight>
+                <a:latin typeface="Avenir Next LT Pro Light"/>
+                <a:cs typeface="Times New Roman"/>
+              </a:rPr>
+              <a:t>Building and Environment</a:t>
+            </a:r>
+            <a:r>
+              <a:rPr lang="en-US" sz="1800">
+                <a:highlight>
+                  <a:srgbClr val="FFFFFF"/>
+                </a:highlight>
+                <a:latin typeface="Avenir Next LT Pro Light"/>
+                <a:cs typeface="Times New Roman"/>
+              </a:rPr>
+              <a:t>, </a:t>
+            </a:r>
+            <a:r>
+              <a:rPr lang="en-US" sz="1800" i="1">
+                <a:highlight>
+                  <a:srgbClr val="FFFFFF"/>
+                </a:highlight>
+                <a:latin typeface="Avenir Next LT Pro Light"/>
+                <a:cs typeface="Times New Roman"/>
+              </a:rPr>
+              <a:t>45</a:t>
+            </a:r>
+            <a:r>
+              <a:rPr lang="en-US" sz="1800">
+                <a:highlight>
+                  <a:srgbClr val="FFFFFF"/>
+                </a:highlight>
+                <a:latin typeface="Avenir Next LT Pro Light"/>
+                <a:cs typeface="Times New Roman"/>
+              </a:rPr>
+              <a:t>(10), 2192–2201. </a:t>
+            </a:r>
+            <a:r>
+              <a:rPr lang="en-US" sz="1800" u="sng" dirty="0">
+                <a:highlight>
+                  <a:srgbClr val="FFFFFF"/>
+                </a:highlight>
+                <a:latin typeface="Avenir Next LT Pro Light"/>
+                <a:cs typeface="Times New Roman"/>
+                <a:hlinkClick r:id="rId3"/>
+              </a:rPr>
+              <a:t>https://doi.org/10.1016/j.buildenv.2010.04.001</a:t>
+            </a:r>
+            <a:r>
+              <a:rPr lang="en-US" sz="1800" dirty="0">
+                <a:highlight>
+                  <a:srgbClr val="FFFFFF"/>
+                </a:highlight>
+                <a:latin typeface="Avenir Next LT Pro Light"/>
+                <a:cs typeface="Times New Roman"/>
+              </a:rPr>
+              <a:t> </a:t>
+            </a:r>
+            <a:endParaRPr lang="en-US" sz="1800" dirty="0">
+              <a:highlight>
+                <a:srgbClr val="C6C6C6"/>
+              </a:highlight>
+              <a:latin typeface="Avenir Next LT Pro Light"/>
+              <a:cs typeface="Times New Roman"/>
+            </a:endParaRPr>
+          </a:p>
+          <a:p>
+            <a:endParaRPr lang="en-US" sz="1800" dirty="0">
+              <a:highlight>
+                <a:srgbClr val="FFFFFF"/>
+              </a:highlight>
+              <a:latin typeface="Times New Roman"/>
+              <a:cs typeface="Times New Roman"/>
+            </a:endParaRPr>
+          </a:p>
+          <a:p>
+            <a:endParaRPr lang="en-US" dirty="0"/>
+          </a:p>
+        </p:txBody>
+      </p:sp>
+      <p:sp>
+        <p:nvSpPr>
+          <p:cNvPr id="4" name="Date Placeholder 3">
+            <a:extLst>
+              <a:ext uri="{FF2B5EF4-FFF2-40B4-BE49-F238E27FC236}">
+                <a16:creationId xmlns:a16="http://schemas.microsoft.com/office/drawing/2014/main" id="{5983E68B-3E0B-337D-7880-89DD3B3F3CB5}"/>
+              </a:ext>
+            </a:extLst>
+          </p:cNvPr>
+          <p:cNvSpPr>
+            <a:spLocks noGrp="1"/>
+          </p:cNvSpPr>
+          <p:nvPr>
+            <p:ph type="dt" sz="half" idx="10"/>
+          </p:nvPr>
+        </p:nvSpPr>
+        <p:spPr/>
+        <p:txBody>
+          <a:bodyPr/>
+          <a:lstStyle/>
+          <a:p>
+            <a:fld id="{73083E24-65F8-4E30-9D74-DC5F7C974220}" type="datetime1">
+              <a:rPr lang="en-US"/>
+              <a:t>5/6/2026</a:t>
+            </a:fld>
+            <a:endParaRPr lang="en-US" dirty="0"/>
+          </a:p>
+        </p:txBody>
+      </p:sp>
+      <p:sp>
+        <p:nvSpPr>
+          <p:cNvPr id="5" name="Footer Placeholder 4">
+            <a:extLst>
+              <a:ext uri="{FF2B5EF4-FFF2-40B4-BE49-F238E27FC236}">
+                <a16:creationId xmlns:a16="http://schemas.microsoft.com/office/drawing/2014/main" id="{6791913C-16C2-850F-AA40-727F3D145E5A}"/>
+              </a:ext>
+            </a:extLst>
+          </p:cNvPr>
+          <p:cNvSpPr>
+            <a:spLocks noGrp="1"/>
+          </p:cNvSpPr>
+          <p:nvPr>
+            <p:ph type="ftr" sz="quarter" idx="11"/>
+          </p:nvPr>
+        </p:nvSpPr>
+        <p:spPr/>
+        <p:txBody>
+          <a:bodyPr/>
+          <a:lstStyle/>
+          <a:p>
+            <a:r>
+              <a:rPr lang="en-US" dirty="0"/>
+              <a:t>
+              </a:t>
+            </a:r>
+          </a:p>
+        </p:txBody>
+      </p:sp>
+      <p:sp>
+        <p:nvSpPr>
+          <p:cNvPr id="6" name="Slide Number Placeholder 5">
+            <a:extLst>
+              <a:ext uri="{FF2B5EF4-FFF2-40B4-BE49-F238E27FC236}">
+                <a16:creationId xmlns:a16="http://schemas.microsoft.com/office/drawing/2014/main" id="{ED7D1710-0883-3DA4-753E-FD7C54DFB2EC}"/>
+              </a:ext>
+            </a:extLst>
+          </p:cNvPr>
+          <p:cNvSpPr>
+            <a:spLocks noGrp="1"/>
+          </p:cNvSpPr>
+          <p:nvPr>
+            <p:ph type="sldNum" sz="quarter" idx="12"/>
+          </p:nvPr>
+        </p:nvSpPr>
+        <p:spPr/>
+        <p:txBody>
+          <a:bodyPr/>
+          <a:lstStyle/>
+          <a:p>
+            <a:fld id="{017DE1FC-E54A-4B87-A814-263D1E8654B2}" type="slidenum">
+              <a:rPr lang="en-US" dirty="0"/>
+              <a:t>16</a:t>
+            </a:fld>
+            <a:endParaRPr lang="en-US" dirty="0"/>
+          </a:p>
+        </p:txBody>
+      </p:sp>
+    </p:spTree>
+    <p:extLst>
+      <p:ext uri="{BB962C8B-B14F-4D97-AF65-F5344CB8AC3E}">
+        <p14:creationId xmlns:p14="http://schemas.microsoft.com/office/powerpoint/2010/main" val="3357628369"/>
+      </p:ext>
+    </p:extLst>
+  </p:cSld>
+  <p:clrMapOvr>
+    <a:masterClrMapping/>
+  </p:clrMapOvr>
+</p:sld>
+</file>
+
+<file path=ppt/slides/slide17.xml><?xml version="1.0" encoding="utf-8"?>
+<p:sld xmlns:a="http://schemas.openxmlformats.org/drawingml/2006/main" xmlns:r="http://schemas.openxmlformats.org/officeDocument/2006/relationships" xmlns:p="http://schemas.openxmlformats.org/presentationml/2006/main">
+  <p:cSld>
+    <p:spTree>
+      <p:nvGrpSpPr>
+        <p:cNvPr id="1" name=""/>
+        <p:cNvGrpSpPr/>
+        <p:nvPr/>
+      </p:nvGrpSpPr>
+      <p:grpSpPr>
+        <a:xfrm>
+          <a:off x="0" y="0"/>
+          <a:ext cx="0" cy="0"/>
+          <a:chOff x="0" y="0"/>
+          <a:chExt cx="0" cy="0"/>
+        </a:xfrm>
+      </p:grpSpPr>
+      <p:sp>
+        <p:nvSpPr>
+          <p:cNvPr id="2" name="Title 1">
+            <a:extLst>
+              <a:ext uri="{FF2B5EF4-FFF2-40B4-BE49-F238E27FC236}">
                 <a16:creationId xmlns:a16="http://schemas.microsoft.com/office/drawing/2014/main" id="{1011ABFF-FA61-B9B8-8694-BF76929C1025}"/>
               </a:ext>
             </a:extLst>
@@ -6371,7 +6785,7 @@
                   <a:spcPts val="600"/>
                 </a:spcAft>
               </a:pPr>
-              <a:t>4/27/2026</a:t>
+              <a:t>5/6/2026</a:t>
             </a:fld>
             <a:endParaRPr lang="en-US"/>
           </a:p>
@@ -6459,7 +6873,7 @@
                   <a:spcPts val="600"/>
                 </a:spcAft>
               </a:pPr>
-              <a:t>16</a:t>
+              <a:t>17</a:t>
             </a:fld>
             <a:endParaRPr lang="en-US"/>
           </a:p>
@@ -6600,7 +7014,7 @@
               </a:rPr>
               <a:t>Urban heat islands occur in cities as heat is stored, absorbed or entrapped more than surrounding rural and suburban areas </a:t>
             </a:r>
-            <a:endParaRPr lang="en-US" sz="2400">
+            <a:endParaRPr lang="en-US" sz="2400" dirty="0">
               <a:latin typeface="Avenir Next LT Pro Light"/>
             </a:endParaRPr>
           </a:p>
@@ -6610,16 +7024,12 @@
               <a:buChar char="Ø"/>
             </a:pPr>
             <a:r>
-              <a:rPr lang="en-US" sz="2400">
+              <a:rPr lang="en-US" sz="2400" dirty="0">
                 <a:latin typeface="Avenir Next LT Pro Light"/>
                 <a:cs typeface="Times New Roman"/>
               </a:rPr>
               <a:t>This intensifies with urbanization, increasing morbidity, and mortality</a:t>
             </a:r>
-            <a:endParaRPr lang="en-US" sz="2400" dirty="0">
-              <a:latin typeface="Avenir Next LT Pro Light"/>
-              <a:cs typeface="Times New Roman"/>
-            </a:endParaRPr>
           </a:p>
           <a:p>
             <a:pPr marL="457200" indent="-457200">
@@ -6649,27 +7059,9 @@
                 </a:highlight>
                 <a:cs typeface="Times New Roman"/>
               </a:rPr>
-              <a:t>How do marginalized communities, specifically communities </a:t>
-            </a:r>
-            <a:r>
-              <a:rPr lang="en-US" sz="2400">
-                <a:highlight>
-                  <a:srgbClr val="FFFFFF"/>
-                </a:highlight>
-                <a:cs typeface="Times New Roman"/>
-              </a:rPr>
-              <a:t>of color</a:t>
-            </a:r>
-            <a:r>
-              <a:rPr lang="en-US" sz="2400" dirty="0">
-                <a:highlight>
-                  <a:srgbClr val="FFFFFF"/>
-                </a:highlight>
-                <a:cs typeface="Times New Roman"/>
-              </a:rPr>
-              <a:t>, experience weather anomalies in their geographical communities? </a:t>
-            </a:r>
-            <a:endParaRPr lang="en-US" sz="2400">
+              <a:t>How do marginalized communities, specifically communities of color, experience weather anomalies in their geographical communities? </a:t>
+            </a:r>
+            <a:endParaRPr lang="en-US" sz="2400" dirty="0">
               <a:cs typeface="Times New Roman"/>
             </a:endParaRPr>
           </a:p>
@@ -6688,25 +7080,7 @@
                 </a:highlight>
                 <a:cs typeface="Times New Roman"/>
               </a:rPr>
-              <a:t>Specifically, how much greater anomalies on heat islands </a:t>
-            </a:r>
-            <a:r>
-              <a:rPr lang="en-US" sz="2400">
-                <a:highlight>
-                  <a:srgbClr val="FFFFFF"/>
-                </a:highlight>
-                <a:cs typeface="Times New Roman"/>
-              </a:rPr>
-              <a:t>when compared</a:t>
-            </a:r>
-            <a:r>
-              <a:rPr lang="en-US" sz="2400" dirty="0">
-                <a:highlight>
-                  <a:srgbClr val="FFFFFF"/>
-                </a:highlight>
-                <a:cs typeface="Times New Roman"/>
-              </a:rPr>
-              <a:t> to county averages?</a:t>
+              <a:t>Specifically, how much greater anomalies on heat islands based on total community of color ?</a:t>
             </a:r>
             <a:endParaRPr lang="en-US" sz="2400" dirty="0"/>
           </a:p>
@@ -6802,7 +7176,7 @@
         </p:spPr>
         <p:txBody>
           <a:bodyPr vert="horz" lIns="91440" tIns="45720" rIns="91440" bIns="45720" rtlCol="0" anchor="t">
-            <a:normAutofit lnSpcReduction="10000"/>
+            <a:normAutofit fontScale="92500"/>
           </a:bodyPr>
           <a:lstStyle/>
           <a:p>
@@ -6820,29 +7194,8 @@
                 </a:solidFill>
                 <a:latin typeface="Avenir Next LT Pro Light"/>
               </a:rPr>
-              <a:t>Utilizing csv files from US Census Data and NOAA to </a:t>
-            </a:r>
-            <a:r>
-              <a:rPr lang="en-US" sz="2400">
-                <a:solidFill>
-                  <a:schemeClr val="tx1">
-                    <a:lumMod val="95000"/>
-                    <a:lumOff val="5000"/>
-                  </a:schemeClr>
-                </a:solidFill>
-                <a:latin typeface="Avenir Next LT Pro Light"/>
-              </a:rPr>
-              <a:t>analyze</a:t>
-            </a:r>
-            <a:endParaRPr lang="en-US" sz="2400" dirty="0">
-              <a:solidFill>
-                <a:schemeClr val="tx1">
-                  <a:lumMod val="95000"/>
-                  <a:lumOff val="5000"/>
-                </a:schemeClr>
-              </a:solidFill>
-              <a:latin typeface="Avenir Next LT Pro Light"/>
-            </a:endParaRPr>
+              <a:t>Utilizing csv files from US Census Data and NOAA to analyze</a:t>
+            </a:r>
           </a:p>
           <a:p>
             <a:pPr marL="457200" indent="-457200">
@@ -6892,31 +7245,8 @@
                 <a:latin typeface="Avenir Next LT Pro Light"/>
                 <a:cs typeface="Times New Roman"/>
               </a:rPr>
-              <a:t>Visualization will consist of comparison between Lebanon </a:t>
-            </a:r>
-            <a:r>
-              <a:rPr lang="en-US" sz="2400">
-                <a:solidFill>
-                  <a:schemeClr val="tx1">
-                    <a:lumMod val="95000"/>
-                    <a:lumOff val="5000"/>
-                  </a:schemeClr>
-                </a:solidFill>
-                <a:latin typeface="Avenir Next LT Pro Light"/>
-                <a:cs typeface="Times New Roman"/>
-              </a:rPr>
-              <a:t>and Harrisburg through line graphs, bar graphs, and tables </a:t>
-            </a:r>
-            <a:endParaRPr lang="en-US" sz="2400" dirty="0">
-              <a:solidFill>
-                <a:schemeClr val="tx1">
-                  <a:lumMod val="95000"/>
-                  <a:lumOff val="5000"/>
-                </a:schemeClr>
-              </a:solidFill>
-              <a:latin typeface="Avenir Next LT Pro Light"/>
-              <a:cs typeface="Times New Roman"/>
-            </a:endParaRPr>
+              <a:t>Visualization will consist of comparison between Lebanon and Harrisburg through line graphs, bar graphs, and tables </a:t>
+            </a:r>
           </a:p>
           <a:p>
             <a:pPr marL="457200" indent="-457200">
@@ -6934,7 +7264,7 @@
                 <a:latin typeface="Avenir Next LT Pro Light"/>
                 <a:cs typeface="Times New Roman"/>
               </a:rPr>
-              <a:t> Summarized in a dashboard using </a:t>
+              <a:t>Climate data is summarized in a dashboard using </a:t>
             </a:r>
             <a:r>
               <a:rPr lang="en-US" sz="2400" dirty="0" err="1">
@@ -6962,7 +7292,7 @@
               </a:rPr>
               <a:t>.</a:t>
             </a:r>
-            <a:endParaRPr lang="en-US" sz="2400">
+            <a:endParaRPr lang="en-US" sz="2400" dirty="0">
               <a:solidFill>
                 <a:schemeClr val="tx1">
                   <a:lumMod val="95000"/>
@@ -7579,7 +7909,7 @@
               <a:buChar char="Ø"/>
             </a:pPr>
             <a:r>
-              <a:rPr lang="en-US">
+              <a:rPr lang="en-US" dirty="0">
                 <a:highlight>
                   <a:srgbClr val="FFFFFF"/>
                 </a:highlight>
@@ -7593,12 +7923,12 @@
               <a:buChar char="q"/>
             </a:pPr>
             <a:r>
-              <a:rPr lang="en-US">
+              <a:rPr lang="en-US" dirty="0">
                 <a:highlight>
                   <a:srgbClr val="FFFFFF"/>
                 </a:highlight>
               </a:rPr>
-              <a:t>Later graphs and maps were created based on the queries </a:t>
+              <a:t>Later graphs and tables were created based on the queries </a:t>
             </a:r>
           </a:p>
           <a:p>
@@ -7606,7 +7936,7 @@
               <a:buFont typeface="Wingdings" panose="020B0604020202020204" pitchFamily="34" charset="0"/>
               <a:buChar char="Ø"/>
             </a:pPr>
-            <a:endParaRPr lang="en-US">
+            <a:endParaRPr lang="en-US" dirty="0">
               <a:highlight>
                 <a:srgbClr val="FFFFFF"/>
               </a:highlight>
@@ -7617,7 +7947,7 @@
               <a:buFont typeface="Wingdings" panose="020B0604020202020204" pitchFamily="34" charset="0"/>
               <a:buChar char="Ø"/>
             </a:pPr>
-            <a:endParaRPr lang="en-US">
+            <a:endParaRPr lang="en-US" dirty="0">
               <a:highlight>
                 <a:srgbClr val="FFFFFF"/>
               </a:highlight>
@@ -7627,7 +7957,7 @@
             <a:pPr marL="0" indent="0">
               <a:buNone/>
             </a:pPr>
-            <a:endParaRPr lang="en-US"/>
+            <a:endParaRPr lang="en-US" dirty="0"/>
           </a:p>
         </p:txBody>
       </p:sp>
@@ -7668,7 +7998,7 @@
                   <a:spcPts val="600"/>
                 </a:spcAft>
               </a:pPr>
-              <a:t>4/27/2026</a:t>
+              <a:t>5/6/2026</a:t>
             </a:fld>
             <a:endParaRPr lang="en-US"/>
           </a:p>
@@ -7929,15 +8259,7 @@
             </a:pPr>
             <a:r>
               <a:rPr lang="en-US" sz="2400" dirty="0"/>
-              <a:t>Data Visualization is based on chosen queries done in </a:t>
-            </a:r>
-            <a:r>
-              <a:rPr lang="en-US" sz="2400" dirty="0" err="1"/>
-              <a:t>PostgresSQL</a:t>
-            </a:r>
-            <a:r>
-              <a:rPr lang="en-US" sz="2400" dirty="0"/>
-              <a:t> </a:t>
+              <a:t>Data Visualization is based on chosen queries done in PostgresSQL </a:t>
             </a:r>
             <a:r>
               <a:rPr lang="en-US" sz="2400" dirty="0" err="1"/>
@@ -7947,7 +8269,7 @@
               <a:rPr lang="en-US" sz="2400" dirty="0"/>
               <a:t> for better visualization for the created query tables</a:t>
             </a:r>
-            <a:endParaRPr lang="en-US"/>
+            <a:endParaRPr lang="en-US" dirty="0"/>
           </a:p>
           <a:p>
             <a:pPr marL="457200" indent="-457200">
@@ -7959,21 +8281,21 @@
                 <a:ea typeface="+mn-lt"/>
                 <a:cs typeface="+mn-lt"/>
               </a:rPr>
-              <a:t>Maps were created using </a:t>
+              <a:t>Census bar graphs were created using python </a:t>
             </a:r>
             <a:r>
               <a:rPr lang="en-US" sz="2400" dirty="0" err="1">
                 <a:ea typeface="+mn-lt"/>
                 <a:cs typeface="+mn-lt"/>
               </a:rPr>
-              <a:t>geopandas</a:t>
+              <a:t>matplotlib</a:t>
             </a:r>
             <a:r>
               <a:rPr lang="en-US" sz="2400" dirty="0">
                 <a:ea typeface="+mn-lt"/>
                 <a:cs typeface="+mn-lt"/>
               </a:rPr>
-              <a:t> to accompany other visualization types</a:t>
+              <a:t> to accompany climate visualization </a:t>
             </a:r>
           </a:p>
           <a:p>
@@ -7994,7 +8316,7 @@
               <a:buFont typeface="Wingdings" panose="020B0604020202020204" pitchFamily="34" charset="0"/>
               <a:buChar char="Ø"/>
             </a:pPr>
-            <a:endParaRPr lang="en-US"/>
+            <a:endParaRPr lang="en-US" dirty="0"/>
           </a:p>
         </p:txBody>
       </p:sp>
@@ -8012,6 +8334,208 @@
 </file>
 
 <file path=ppt/slides/slide8.xml><?xml version="1.0" encoding="utf-8"?>
+<p:sld xmlns:a="http://schemas.openxmlformats.org/drawingml/2006/main" xmlns:r="http://schemas.openxmlformats.org/officeDocument/2006/relationships" xmlns:p="http://schemas.openxmlformats.org/presentationml/2006/main">
+  <p:cSld>
+    <p:spTree>
+      <p:nvGrpSpPr>
+        <p:cNvPr id="1" name="">
+          <a:extLst>
+            <a:ext uri="{FF2B5EF4-FFF2-40B4-BE49-F238E27FC236}">
+              <a16:creationId xmlns:a16="http://schemas.microsoft.com/office/drawing/2014/main" id="{70014BDE-43BB-B9C5-C507-3A299DD9A845}"/>
+            </a:ext>
+          </a:extLst>
+        </p:cNvPr>
+        <p:cNvGrpSpPr/>
+        <p:nvPr/>
+      </p:nvGrpSpPr>
+      <p:grpSpPr>
+        <a:xfrm>
+          <a:off x="0" y="0"/>
+          <a:ext cx="0" cy="0"/>
+          <a:chOff x="0" y="0"/>
+          <a:chExt cx="0" cy="0"/>
+        </a:xfrm>
+      </p:grpSpPr>
+      <p:sp>
+        <p:nvSpPr>
+          <p:cNvPr id="10" name="Title 1">
+            <a:extLst>
+              <a:ext uri="{FF2B5EF4-FFF2-40B4-BE49-F238E27FC236}">
+                <a16:creationId xmlns:a16="http://schemas.microsoft.com/office/drawing/2014/main" id="{CBFB0EA4-F947-D6A2-8044-97E14988475D}"/>
+              </a:ext>
+            </a:extLst>
+          </p:cNvPr>
+          <p:cNvSpPr>
+            <a:spLocks noGrp="1"/>
+          </p:cNvSpPr>
+          <p:nvPr>
+            <p:ph type="title"/>
+          </p:nvPr>
+        </p:nvSpPr>
+        <p:spPr>
+          <a:xfrm>
+            <a:off x="900877" y="3652491"/>
+            <a:ext cx="3303731" cy="1709928"/>
+          </a:xfrm>
+        </p:spPr>
+        <p:txBody>
+          <a:bodyPr vert="horz" lIns="0" tIns="0" rIns="0" bIns="0" rtlCol="0" anchor="b">
+            <a:noAutofit/>
+          </a:bodyPr>
+          <a:lstStyle/>
+          <a:p>
+            <a:r>
+              <a:rPr lang="en-US" sz="2400" b="0" dirty="0">
+                <a:solidFill>
+                  <a:srgbClr val="DA002F"/>
+                </a:solidFill>
+                <a:latin typeface="Avenir Next LT Pro"/>
+              </a:rPr>
+              <a:t>Maximum in </a:t>
+            </a:r>
+            <a:r>
+              <a:rPr lang="en-US" sz="2400" b="0">
+                <a:solidFill>
+                  <a:srgbClr val="DA002F"/>
+                </a:solidFill>
+                <a:latin typeface="Avenir Next LT Pro"/>
+              </a:rPr>
+              <a:t>temperature</a:t>
+            </a:r>
+            <a:br>
+              <a:rPr lang="en-US" sz="2400" b="0" dirty="0">
+                <a:solidFill>
+                  <a:srgbClr val="DA002F"/>
+                </a:solidFill>
+                <a:latin typeface="Avenir Next LT Pro"/>
+              </a:rPr>
+            </a:br>
+            <a:r>
+              <a:rPr lang="en-US" sz="2400" b="0">
+                <a:solidFill>
+                  <a:srgbClr val="DA002F"/>
+                </a:solidFill>
+                <a:latin typeface="Avenir Next LT Pro"/>
+              </a:rPr>
+              <a:t>By months </a:t>
+            </a:r>
+            <a:endParaRPr lang="en-US" sz="2400" b="0">
+              <a:solidFill>
+                <a:srgbClr val="DA002F"/>
+              </a:solidFill>
+            </a:endParaRPr>
+          </a:p>
+          <a:p>
+            <a:endParaRPr lang="en-US" sz="2800" dirty="0">
+              <a:solidFill>
+                <a:schemeClr val="accent5"/>
+              </a:solidFill>
+            </a:endParaRPr>
+          </a:p>
+        </p:txBody>
+      </p:sp>
+      <p:sp>
+        <p:nvSpPr>
+          <p:cNvPr id="4" name="TextBox 3">
+            <a:extLst>
+              <a:ext uri="{FF2B5EF4-FFF2-40B4-BE49-F238E27FC236}">
+                <a16:creationId xmlns:a16="http://schemas.microsoft.com/office/drawing/2014/main" id="{00CA3348-CDBE-059C-B05C-DF4D1F451950}"/>
+              </a:ext>
+            </a:extLst>
+          </p:cNvPr>
+          <p:cNvSpPr txBox="1"/>
+          <p:nvPr/>
+        </p:nvSpPr>
+        <p:spPr>
+          <a:xfrm>
+            <a:off x="5899812" y="5747054"/>
+            <a:ext cx="4094480" cy="523220"/>
+          </a:xfrm>
+          <a:prstGeom prst="rect">
+            <a:avLst/>
+          </a:prstGeom>
+          <a:noFill/>
+        </p:spPr>
+        <p:txBody>
+          <a:bodyPr rot="0" spcFirstLastPara="0" vertOverflow="overflow" horzOverflow="overflow" vert="horz" wrap="square" lIns="91440" tIns="45720" rIns="91440" bIns="45720" numCol="1" spcCol="0" rtlCol="0" fromWordArt="0" anchor="t" anchorCtr="0" forceAA="0" compatLnSpc="1">
+            <a:prstTxWarp prst="textNoShape">
+              <a:avLst/>
+            </a:prstTxWarp>
+            <a:spAutoFit/>
+          </a:bodyPr>
+          <a:lstStyle/>
+          <a:p>
+            <a:r>
+              <a:rPr lang="en-US" sz="1400" baseline="0">
+                <a:solidFill>
+                  <a:srgbClr val="000000"/>
+                </a:solidFill>
+                <a:latin typeface="Avenir Next LT Pro"/>
+              </a:rPr>
+              <a:t>Previous SQL Query and Metabase to Visualize</a:t>
+            </a:r>
+            <a:endParaRPr lang="en-US" sz="1400">
+              <a:solidFill>
+                <a:srgbClr val="000000"/>
+              </a:solidFill>
+              <a:latin typeface="Avenir Next LT Pro"/>
+            </a:endParaRPr>
+          </a:p>
+          <a:p>
+            <a:pPr algn="ctr"/>
+            <a:endParaRPr lang="en-US" sz="1400">
+              <a:solidFill>
+                <a:srgbClr val="000000"/>
+              </a:solidFill>
+              <a:latin typeface="Avenir Next LT Pro"/>
+            </a:endParaRPr>
+          </a:p>
+        </p:txBody>
+      </p:sp>
+      <p:pic>
+        <p:nvPicPr>
+          <p:cNvPr id="2" name="Picture 1">
+            <a:extLst>
+              <a:ext uri="{FF2B5EF4-FFF2-40B4-BE49-F238E27FC236}">
+                <a16:creationId xmlns:a16="http://schemas.microsoft.com/office/drawing/2014/main" id="{BE75264A-1FBB-6724-016D-346F06752121}"/>
+              </a:ext>
+            </a:extLst>
+          </p:cNvPr>
+          <p:cNvPicPr>
+            <a:picLocks noChangeAspect="1"/>
+          </p:cNvPicPr>
+          <p:nvPr/>
+        </p:nvPicPr>
+        <p:blipFill>
+          <a:blip r:embed="rId2"/>
+          <a:stretch>
+            <a:fillRect/>
+          </a:stretch>
+        </p:blipFill>
+        <p:spPr>
+          <a:xfrm>
+            <a:off x="4056564" y="1743159"/>
+            <a:ext cx="7768557" cy="3812841"/>
+          </a:xfrm>
+          <a:prstGeom prst="rect">
+            <a:avLst/>
+          </a:prstGeom>
+        </p:spPr>
+      </p:pic>
+    </p:spTree>
+    <p:extLst>
+      <p:ext uri="{BB962C8B-B14F-4D97-AF65-F5344CB8AC3E}">
+        <p14:creationId xmlns:p14="http://schemas.microsoft.com/office/powerpoint/2010/main" val="4078403049"/>
+      </p:ext>
+    </p:extLst>
+  </p:cSld>
+  <p:clrMapOvr>
+    <a:masterClrMapping/>
+  </p:clrMapOvr>
+</p:sld>
+</file>
+
+<file path=ppt/slides/slide9.xml><?xml version="1.0" encoding="utf-8"?>
 <p:sld xmlns:a="http://schemas.openxmlformats.org/drawingml/2006/main" xmlns:r="http://schemas.openxmlformats.org/officeDocument/2006/relationships" xmlns:p="http://schemas.openxmlformats.org/presentationml/2006/main">
   <p:cSld>
     <p:spTree>
@@ -8069,7 +8593,7 @@
                 </a:solidFill>
                 <a:latin typeface="Avenir Next LT Pro"/>
               </a:rPr>
-              <a:t>Averages in temperatures compared to maximum </a:t>
+              <a:t>Averages in </a:t>
             </a:r>
             <a:r>
               <a:rPr lang="en-US" sz="2400" b="0">
@@ -8078,7 +8602,7 @@
                 </a:solidFill>
                 <a:latin typeface="Avenir Next LT Pro"/>
               </a:rPr>
-              <a:t>temperature</a:t>
+              <a:t>temperatureBy month</a:t>
             </a:r>
             <a:r>
               <a:rPr lang="en-US" sz="2400" b="0" dirty="0">
@@ -8164,10 +8688,10 @@
       </p:sp>
       <p:pic>
         <p:nvPicPr>
-          <p:cNvPr id="7" name="Picture 6">
-            <a:extLst>
-              <a:ext uri="{FF2B5EF4-FFF2-40B4-BE49-F238E27FC236}">
-                <a16:creationId xmlns:a16="http://schemas.microsoft.com/office/drawing/2014/main" id="{85A71E9E-A8B9-DEF4-60A7-3D1EF2B42BE7}"/>
+          <p:cNvPr id="3" name="Picture 2">
+            <a:extLst>
+              <a:ext uri="{FF2B5EF4-FFF2-40B4-BE49-F238E27FC236}">
+                <a16:creationId xmlns:a16="http://schemas.microsoft.com/office/drawing/2014/main" id="{840A78EE-B8B1-F6ED-67F3-944522266233}"/>
               </a:ext>
             </a:extLst>
           </p:cNvPr>
@@ -8184,8 +8708,8 @@
         </p:blipFill>
         <p:spPr>
           <a:xfrm>
-            <a:off x="4813407" y="1887031"/>
-            <a:ext cx="7222901" cy="3490338"/>
+            <a:off x="4321122" y="1495581"/>
+            <a:ext cx="7718040" cy="3776023"/>
           </a:xfrm>
           <a:prstGeom prst="rect">
             <a:avLst/>
@@ -8196,200 +8720,6 @@
     <p:extLst>
       <p:ext uri="{BB962C8B-B14F-4D97-AF65-F5344CB8AC3E}">
         <p14:creationId xmlns:p14="http://schemas.microsoft.com/office/powerpoint/2010/main" val="2811863414"/>
-      </p:ext>
-    </p:extLst>
-  </p:cSld>
-  <p:clrMapOvr>
-    <a:masterClrMapping/>
-  </p:clrMapOvr>
-</p:sld>
-</file>
-
-<file path=ppt/slides/slide9.xml><?xml version="1.0" encoding="utf-8"?>
-<p:sld xmlns:a="http://schemas.openxmlformats.org/drawingml/2006/main" xmlns:r="http://schemas.openxmlformats.org/officeDocument/2006/relationships" xmlns:p="http://schemas.openxmlformats.org/presentationml/2006/main">
-  <p:cSld>
-    <p:spTree>
-      <p:nvGrpSpPr>
-        <p:cNvPr id="1" name="">
-          <a:extLst>
-            <a:ext uri="{FF2B5EF4-FFF2-40B4-BE49-F238E27FC236}">
-              <a16:creationId xmlns:a16="http://schemas.microsoft.com/office/drawing/2014/main" id="{219CB309-B20B-18F4-070B-C2430691B5C2}"/>
-            </a:ext>
-          </a:extLst>
-        </p:cNvPr>
-        <p:cNvGrpSpPr/>
-        <p:nvPr/>
-      </p:nvGrpSpPr>
-      <p:grpSpPr>
-        <a:xfrm>
-          <a:off x="0" y="0"/>
-          <a:ext cx="0" cy="0"/>
-          <a:chOff x="0" y="0"/>
-          <a:chExt cx="0" cy="0"/>
-        </a:xfrm>
-      </p:grpSpPr>
-      <p:sp>
-        <p:nvSpPr>
-          <p:cNvPr id="10" name="Title 1">
-            <a:extLst>
-              <a:ext uri="{FF2B5EF4-FFF2-40B4-BE49-F238E27FC236}">
-                <a16:creationId xmlns:a16="http://schemas.microsoft.com/office/drawing/2014/main" id="{269F750B-8F92-7E74-4C71-BB0686CC82C4}"/>
-              </a:ext>
-            </a:extLst>
-          </p:cNvPr>
-          <p:cNvSpPr>
-            <a:spLocks noGrp="1"/>
-          </p:cNvSpPr>
-          <p:nvPr>
-            <p:ph type="title"/>
-          </p:nvPr>
-        </p:nvSpPr>
-        <p:spPr>
-          <a:xfrm>
-            <a:off x="900877" y="3652491"/>
-            <a:ext cx="3303731" cy="1709928"/>
-          </a:xfrm>
-        </p:spPr>
-        <p:txBody>
-          <a:bodyPr vert="horz" lIns="0" tIns="0" rIns="0" bIns="0" rtlCol="0" anchor="b">
-            <a:noAutofit/>
-          </a:bodyPr>
-          <a:lstStyle/>
-          <a:p>
-            <a:r>
-              <a:rPr lang="en-US" sz="2400" b="0" dirty="0">
-                <a:solidFill>
-                  <a:srgbClr val="DA002F"/>
-                </a:solidFill>
-                <a:latin typeface="Avenir Next LT Pro"/>
-              </a:rPr>
-              <a:t> maximum </a:t>
-            </a:r>
-            <a:r>
-              <a:rPr lang="en-US" sz="2400" b="0">
-                <a:solidFill>
-                  <a:srgbClr val="DA002F"/>
-                </a:solidFill>
-                <a:latin typeface="Avenir Next LT Pro"/>
-              </a:rPr>
-              <a:t>temperature</a:t>
-            </a:r>
-            <a:r>
-              <a:rPr lang="en-US" sz="2400" b="0" dirty="0">
-                <a:solidFill>
-                  <a:srgbClr val="DA002F"/>
-                </a:solidFill>
-                <a:latin typeface="Avenir Next LT Pro"/>
-              </a:rPr>
-              <a:t> </a:t>
-            </a:r>
-            <a:endParaRPr lang="en-US" sz="2400" b="0" dirty="0">
-              <a:solidFill>
-                <a:srgbClr val="DA002F"/>
-              </a:solidFill>
-            </a:endParaRPr>
-          </a:p>
-          <a:p>
-            <a:endParaRPr lang="en-US" sz="2800" dirty="0">
-              <a:solidFill>
-                <a:schemeClr val="accent5"/>
-              </a:solidFill>
-            </a:endParaRPr>
-          </a:p>
-        </p:txBody>
-      </p:sp>
-      <p:sp>
-        <p:nvSpPr>
-          <p:cNvPr id="4" name="TextBox 3">
-            <a:extLst>
-              <a:ext uri="{FF2B5EF4-FFF2-40B4-BE49-F238E27FC236}">
-                <a16:creationId xmlns:a16="http://schemas.microsoft.com/office/drawing/2014/main" id="{204878CF-45AA-1A24-9E1B-77A2E3842D97}"/>
-              </a:ext>
-            </a:extLst>
-          </p:cNvPr>
-          <p:cNvSpPr txBox="1"/>
-          <p:nvPr/>
-        </p:nvSpPr>
-        <p:spPr>
-          <a:xfrm>
-            <a:off x="5899812" y="5747054"/>
-            <a:ext cx="4094480" cy="523220"/>
-          </a:xfrm>
-          <a:prstGeom prst="rect">
-            <a:avLst/>
-          </a:prstGeom>
-          <a:noFill/>
-        </p:spPr>
-        <p:txBody>
-          <a:bodyPr rot="0" spcFirstLastPara="0" vertOverflow="overflow" horzOverflow="overflow" vert="horz" wrap="square" lIns="91440" tIns="45720" rIns="91440" bIns="45720" numCol="1" spcCol="0" rtlCol="0" fromWordArt="0" anchor="t" anchorCtr="0" forceAA="0" compatLnSpc="1">
-            <a:prstTxWarp prst="textNoShape">
-              <a:avLst/>
-            </a:prstTxWarp>
-            <a:spAutoFit/>
-          </a:bodyPr>
-          <a:lstStyle/>
-          <a:p>
-            <a:r>
-              <a:rPr lang="en-US" sz="1400" baseline="0">
-                <a:solidFill>
-                  <a:srgbClr val="000000"/>
-                </a:solidFill>
-                <a:latin typeface="Avenir Next LT Pro"/>
-              </a:rPr>
-              <a:t>Previous SQL Query and Metabase to Visualize</a:t>
-            </a:r>
-            <a:endParaRPr lang="en-US" sz="1400">
-              <a:solidFill>
-                <a:srgbClr val="000000"/>
-              </a:solidFill>
-              <a:latin typeface="Avenir Next LT Pro"/>
-            </a:endParaRPr>
-          </a:p>
-          <a:p>
-            <a:pPr algn="ctr"/>
-            <a:endParaRPr lang="en-US" sz="1400">
-              <a:solidFill>
-                <a:srgbClr val="000000"/>
-              </a:solidFill>
-              <a:latin typeface="Avenir Next LT Pro"/>
-            </a:endParaRPr>
-          </a:p>
-        </p:txBody>
-      </p:sp>
-      <p:pic>
-        <p:nvPicPr>
-          <p:cNvPr id="3" name="Picture 2" descr="A graph of the temperature of the past climate&#10;&#10;AI-generated content may be incorrect.">
-            <a:extLst>
-              <a:ext uri="{FF2B5EF4-FFF2-40B4-BE49-F238E27FC236}">
-                <a16:creationId xmlns:a16="http://schemas.microsoft.com/office/drawing/2014/main" id="{9AABBA59-EBC8-6917-8131-500306526899}"/>
-              </a:ext>
-            </a:extLst>
-          </p:cNvPr>
-          <p:cNvPicPr>
-            <a:picLocks noChangeAspect="1"/>
-          </p:cNvPicPr>
-          <p:nvPr/>
-        </p:nvPicPr>
-        <p:blipFill>
-          <a:blip r:embed="rId2"/>
-          <a:stretch>
-            <a:fillRect/>
-          </a:stretch>
-        </p:blipFill>
-        <p:spPr>
-          <a:xfrm>
-            <a:off x="4196392" y="1306542"/>
-            <a:ext cx="7591784" cy="4058189"/>
-          </a:xfrm>
-          <a:prstGeom prst="rect">
-            <a:avLst/>
-          </a:prstGeom>
-        </p:spPr>
-      </p:pic>
-    </p:spTree>
-    <p:extLst>
-      <p:ext uri="{BB962C8B-B14F-4D97-AF65-F5344CB8AC3E}">
-        <p14:creationId xmlns:p14="http://schemas.microsoft.com/office/powerpoint/2010/main" val="815006305"/>
       </p:ext>
     </p:extLst>
   </p:cSld>
